--- a/docs/diagrams/cuga-flo-a2a-remote-agent-briefing.pptx
+++ b/docs/diagrams/cuga-flo-a2a-remote-agent-briefing.pptx
@@ -5,23 +5,17 @@
     <p:sldMasterId id="2147483648" r:id="rId1"/>
   </p:sldMasterIdLst>
   <p:sldIdLst>
-    <p:sldId id="256" r:id="rId7"/>
-    <p:sldId id="257" r:id="rId8"/>
-    <p:sldId id="258" r:id="rId9"/>
-    <p:sldId id="259" r:id="rId10"/>
-    <p:sldId id="260" r:id="rId11"/>
-    <p:sldId id="261" r:id="rId12"/>
-    <p:sldId id="262" r:id="rId13"/>
-    <p:sldId id="263" r:id="rId14"/>
-    <p:sldId id="264" r:id="rId15"/>
-    <p:sldId id="265" r:id="rId16"/>
-    <p:sldId id="266" r:id="rId17"/>
-    <p:sldId id="267" r:id="rId18"/>
-    <p:sldId id="268" r:id="rId19"/>
-    <p:sldId id="269" r:id="rId20"/>
-    <p:sldId id="270" r:id="rId21"/>
+    <p:sldId id="256" r:id="rId2"/>
+    <p:sldId id="258" r:id="rId3"/>
+    <p:sldId id="260" r:id="rId4"/>
+    <p:sldId id="262" r:id="rId5"/>
+    <p:sldId id="263" r:id="rId6"/>
+    <p:sldId id="264" r:id="rId7"/>
+    <p:sldId id="266" r:id="rId8"/>
+    <p:sldId id="267" r:id="rId9"/>
+    <p:sldId id="268" r:id="rId10"/>
   </p:sldIdLst>
-  <p:sldSz cx="12191695" cy="6858000" type="screen4x3"/>
+  <p:sldSz cx="12192000" cy="6858000"/>
   <p:notesSz cx="6858000" cy="9144000"/>
   <p:defaultTextStyle>
     <a:defPPr>
@@ -118,6 +112,22 @@
       </a:defRPr>
     </a:lvl9pPr>
   </p:defaultTextStyle>
+  <p:extLst>
+    <p:ext uri="{EFAFB233-063F-42B5-8137-9DF3F51BA10A}">
+      <p15:sldGuideLst xmlns:p15="http://schemas.microsoft.com/office/powerpoint/2012/main">
+        <p15:guide id="1" orient="horz" pos="2160">
+          <p15:clr>
+            <a:srgbClr val="A4A3A4"/>
+          </p15:clr>
+        </p15:guide>
+        <p15:guide id="2" pos="2880">
+          <p15:clr>
+            <a:srgbClr val="A4A3A4"/>
+          </p15:clr>
+        </p15:guide>
+      </p15:sldGuideLst>
+    </p:ext>
+  </p:extLst>
 </p:presentation>
 </file>
 
@@ -159,10 +169,9 @@
           <a:lstStyle/>
           <a:p>
             <a:r>
-              <a:rPr lang="en-US" smtClean="0"/>
+              <a:rPr lang="en-US"/>
               <a:t>Click to edit Master title style</a:t>
             </a:r>
-            <a:endParaRPr lang="en-US"/>
           </a:p>
         </p:txBody>
       </p:sp>
@@ -278,10 +287,9 @@
           </a:lstStyle>
           <a:p>
             <a:r>
-              <a:rPr lang="en-US" smtClean="0"/>
+              <a:rPr lang="en-US"/>
               <a:t>Click to edit Master subtitle style</a:t>
             </a:r>
-            <a:endParaRPr lang="en-US"/>
           </a:p>
         </p:txBody>
       </p:sp>
@@ -302,7 +310,7 @@
           <a:p>
             <a:fld id="{5BCAD085-E8A6-8845-BD4E-CB4CCA059FC4}" type="datetimeFigureOut">
               <a:rPr lang="en-US" smtClean="0"/>
-              <a:t>1/27/13</a:t>
+              <a:t>9/1/26</a:t>
             </a:fld>
             <a:endParaRPr lang="en-US"/>
           </a:p>
@@ -396,10 +404,9 @@
           <a:lstStyle/>
           <a:p>
             <a:r>
-              <a:rPr lang="en-US" smtClean="0"/>
+              <a:rPr lang="en-US"/>
               <a:t>Click to edit Master title style</a:t>
             </a:r>
-            <a:endParaRPr lang="en-US"/>
           </a:p>
         </p:txBody>
       </p:sp>
@@ -420,38 +427,37 @@
           <a:p>
             <a:pPr lvl="0"/>
             <a:r>
-              <a:rPr lang="en-US" smtClean="0"/>
+              <a:rPr lang="en-US"/>
               <a:t>Click to edit Master text styles</a:t>
             </a:r>
           </a:p>
           <a:p>
             <a:pPr lvl="1"/>
             <a:r>
-              <a:rPr lang="en-US" smtClean="0"/>
+              <a:rPr lang="en-US"/>
               <a:t>Second level</a:t>
             </a:r>
           </a:p>
           <a:p>
             <a:pPr lvl="2"/>
             <a:r>
-              <a:rPr lang="en-US" smtClean="0"/>
+              <a:rPr lang="en-US"/>
               <a:t>Third level</a:t>
             </a:r>
           </a:p>
           <a:p>
             <a:pPr lvl="3"/>
             <a:r>
-              <a:rPr lang="en-US" smtClean="0"/>
+              <a:rPr lang="en-US"/>
               <a:t>Fourth level</a:t>
             </a:r>
           </a:p>
           <a:p>
             <a:pPr lvl="4"/>
             <a:r>
-              <a:rPr lang="en-US" smtClean="0"/>
+              <a:rPr lang="en-US"/>
               <a:t>Fifth level</a:t>
             </a:r>
-            <a:endParaRPr lang="en-US"/>
           </a:p>
         </p:txBody>
       </p:sp>
@@ -472,7 +478,7 @@
           <a:p>
             <a:fld id="{5BCAD085-E8A6-8845-BD4E-CB4CCA059FC4}" type="datetimeFigureOut">
               <a:rPr lang="en-US" smtClean="0"/>
-              <a:t>1/27/13</a:t>
+              <a:t>9/1/26</a:t>
             </a:fld>
             <a:endParaRPr lang="en-US"/>
           </a:p>
@@ -571,10 +577,9 @@
           <a:lstStyle/>
           <a:p>
             <a:r>
-              <a:rPr lang="en-US" smtClean="0"/>
+              <a:rPr lang="en-US"/>
               <a:t>Click to edit Master title style</a:t>
             </a:r>
-            <a:endParaRPr lang="en-US"/>
           </a:p>
         </p:txBody>
       </p:sp>
@@ -600,38 +605,37 @@
           <a:p>
             <a:pPr lvl="0"/>
             <a:r>
-              <a:rPr lang="en-US" smtClean="0"/>
+              <a:rPr lang="en-US"/>
               <a:t>Click to edit Master text styles</a:t>
             </a:r>
           </a:p>
           <a:p>
             <a:pPr lvl="1"/>
             <a:r>
-              <a:rPr lang="en-US" smtClean="0"/>
+              <a:rPr lang="en-US"/>
               <a:t>Second level</a:t>
             </a:r>
           </a:p>
           <a:p>
             <a:pPr lvl="2"/>
             <a:r>
-              <a:rPr lang="en-US" smtClean="0"/>
+              <a:rPr lang="en-US"/>
               <a:t>Third level</a:t>
             </a:r>
           </a:p>
           <a:p>
             <a:pPr lvl="3"/>
             <a:r>
-              <a:rPr lang="en-US" smtClean="0"/>
+              <a:rPr lang="en-US"/>
               <a:t>Fourth level</a:t>
             </a:r>
           </a:p>
           <a:p>
             <a:pPr lvl="4"/>
             <a:r>
-              <a:rPr lang="en-US" smtClean="0"/>
+              <a:rPr lang="en-US"/>
               <a:t>Fifth level</a:t>
             </a:r>
-            <a:endParaRPr lang="en-US"/>
           </a:p>
         </p:txBody>
       </p:sp>
@@ -652,7 +656,7 @@
           <a:p>
             <a:fld id="{5BCAD085-E8A6-8845-BD4E-CB4CCA059FC4}" type="datetimeFigureOut">
               <a:rPr lang="en-US" smtClean="0"/>
-              <a:t>1/27/13</a:t>
+              <a:t>9/1/26</a:t>
             </a:fld>
             <a:endParaRPr lang="en-US"/>
           </a:p>
@@ -746,10 +750,9 @@
           <a:lstStyle/>
           <a:p>
             <a:r>
-              <a:rPr lang="en-US" smtClean="0"/>
+              <a:rPr lang="en-US"/>
               <a:t>Click to edit Master title style</a:t>
             </a:r>
-            <a:endParaRPr lang="en-US"/>
           </a:p>
         </p:txBody>
       </p:sp>
@@ -770,38 +773,37 @@
           <a:p>
             <a:pPr lvl="0"/>
             <a:r>
-              <a:rPr lang="en-US" smtClean="0"/>
+              <a:rPr lang="en-US"/>
               <a:t>Click to edit Master text styles</a:t>
             </a:r>
           </a:p>
           <a:p>
             <a:pPr lvl="1"/>
             <a:r>
-              <a:rPr lang="en-US" smtClean="0"/>
+              <a:rPr lang="en-US"/>
               <a:t>Second level</a:t>
             </a:r>
           </a:p>
           <a:p>
             <a:pPr lvl="2"/>
             <a:r>
-              <a:rPr lang="en-US" smtClean="0"/>
+              <a:rPr lang="en-US"/>
               <a:t>Third level</a:t>
             </a:r>
           </a:p>
           <a:p>
             <a:pPr lvl="3"/>
             <a:r>
-              <a:rPr lang="en-US" smtClean="0"/>
+              <a:rPr lang="en-US"/>
               <a:t>Fourth level</a:t>
             </a:r>
           </a:p>
           <a:p>
             <a:pPr lvl="4"/>
             <a:r>
-              <a:rPr lang="en-US" smtClean="0"/>
+              <a:rPr lang="en-US"/>
               <a:t>Fifth level</a:t>
             </a:r>
-            <a:endParaRPr lang="en-US"/>
           </a:p>
         </p:txBody>
       </p:sp>
@@ -822,7 +824,7 @@
           <a:p>
             <a:fld id="{5BCAD085-E8A6-8845-BD4E-CB4CCA059FC4}" type="datetimeFigureOut">
               <a:rPr lang="en-US" smtClean="0"/>
-              <a:t>1/27/13</a:t>
+              <a:t>9/1/26</a:t>
             </a:fld>
             <a:endParaRPr lang="en-US"/>
           </a:p>
@@ -925,10 +927,9 @@
           </a:lstStyle>
           <a:p>
             <a:r>
-              <a:rPr lang="en-US" smtClean="0"/>
+              <a:rPr lang="en-US"/>
               <a:t>Click to edit Master title style</a:t>
             </a:r>
-            <a:endParaRPr lang="en-US"/>
           </a:p>
         </p:txBody>
       </p:sp>
@@ -1045,7 +1046,7 @@
           <a:p>
             <a:pPr lvl="0"/>
             <a:r>
-              <a:rPr lang="en-US" smtClean="0"/>
+              <a:rPr lang="en-US"/>
               <a:t>Click to edit Master text styles</a:t>
             </a:r>
           </a:p>
@@ -1068,7 +1069,7 @@
           <a:p>
             <a:fld id="{5BCAD085-E8A6-8845-BD4E-CB4CCA059FC4}" type="datetimeFigureOut">
               <a:rPr lang="en-US" smtClean="0"/>
-              <a:t>1/27/13</a:t>
+              <a:t>9/1/26</a:t>
             </a:fld>
             <a:endParaRPr lang="en-US"/>
           </a:p>
@@ -1162,10 +1163,9 @@
           <a:lstStyle/>
           <a:p>
             <a:r>
-              <a:rPr lang="en-US" smtClean="0"/>
+              <a:rPr lang="en-US"/>
               <a:t>Click to edit Master title style</a:t>
             </a:r>
-            <a:endParaRPr lang="en-US"/>
           </a:p>
         </p:txBody>
       </p:sp>
@@ -1219,38 +1219,37 @@
           <a:p>
             <a:pPr lvl="0"/>
             <a:r>
-              <a:rPr lang="en-US" smtClean="0"/>
+              <a:rPr lang="en-US"/>
               <a:t>Click to edit Master text styles</a:t>
             </a:r>
           </a:p>
           <a:p>
             <a:pPr lvl="1"/>
             <a:r>
-              <a:rPr lang="en-US" smtClean="0"/>
+              <a:rPr lang="en-US"/>
               <a:t>Second level</a:t>
             </a:r>
           </a:p>
           <a:p>
             <a:pPr lvl="2"/>
             <a:r>
-              <a:rPr lang="en-US" smtClean="0"/>
+              <a:rPr lang="en-US"/>
               <a:t>Third level</a:t>
             </a:r>
           </a:p>
           <a:p>
             <a:pPr lvl="3"/>
             <a:r>
-              <a:rPr lang="en-US" smtClean="0"/>
+              <a:rPr lang="en-US"/>
               <a:t>Fourth level</a:t>
             </a:r>
           </a:p>
           <a:p>
             <a:pPr lvl="4"/>
             <a:r>
-              <a:rPr lang="en-US" smtClean="0"/>
+              <a:rPr lang="en-US"/>
               <a:t>Fifth level</a:t>
             </a:r>
-            <a:endParaRPr lang="en-US"/>
           </a:p>
         </p:txBody>
       </p:sp>
@@ -1304,38 +1303,37 @@
           <a:p>
             <a:pPr lvl="0"/>
             <a:r>
-              <a:rPr lang="en-US" smtClean="0"/>
+              <a:rPr lang="en-US"/>
               <a:t>Click to edit Master text styles</a:t>
             </a:r>
           </a:p>
           <a:p>
             <a:pPr lvl="1"/>
             <a:r>
-              <a:rPr lang="en-US" smtClean="0"/>
+              <a:rPr lang="en-US"/>
               <a:t>Second level</a:t>
             </a:r>
           </a:p>
           <a:p>
             <a:pPr lvl="2"/>
             <a:r>
-              <a:rPr lang="en-US" smtClean="0"/>
+              <a:rPr lang="en-US"/>
               <a:t>Third level</a:t>
             </a:r>
           </a:p>
           <a:p>
             <a:pPr lvl="3"/>
             <a:r>
-              <a:rPr lang="en-US" smtClean="0"/>
+              <a:rPr lang="en-US"/>
               <a:t>Fourth level</a:t>
             </a:r>
           </a:p>
           <a:p>
             <a:pPr lvl="4"/>
             <a:r>
-              <a:rPr lang="en-US" smtClean="0"/>
+              <a:rPr lang="en-US"/>
               <a:t>Fifth level</a:t>
             </a:r>
-            <a:endParaRPr lang="en-US"/>
           </a:p>
         </p:txBody>
       </p:sp>
@@ -1356,7 +1354,7 @@
           <a:p>
             <a:fld id="{5BCAD085-E8A6-8845-BD4E-CB4CCA059FC4}" type="datetimeFigureOut">
               <a:rPr lang="en-US" smtClean="0"/>
-              <a:t>1/27/13</a:t>
+              <a:t>9/1/26</a:t>
             </a:fld>
             <a:endParaRPr lang="en-US"/>
           </a:p>
@@ -1454,10 +1452,9 @@
           </a:lstStyle>
           <a:p>
             <a:r>
-              <a:rPr lang="en-US" smtClean="0"/>
+              <a:rPr lang="en-US"/>
               <a:t>Click to edit Master title style</a:t>
             </a:r>
-            <a:endParaRPr lang="en-US"/>
           </a:p>
         </p:txBody>
       </p:sp>
@@ -1520,7 +1517,7 @@
           <a:p>
             <a:pPr lvl="0"/>
             <a:r>
-              <a:rPr lang="en-US" smtClean="0"/>
+              <a:rPr lang="en-US"/>
               <a:t>Click to edit Master text styles</a:t>
             </a:r>
           </a:p>
@@ -1576,38 +1573,37 @@
           <a:p>
             <a:pPr lvl="0"/>
             <a:r>
-              <a:rPr lang="en-US" smtClean="0"/>
+              <a:rPr lang="en-US"/>
               <a:t>Click to edit Master text styles</a:t>
             </a:r>
           </a:p>
           <a:p>
             <a:pPr lvl="1"/>
             <a:r>
-              <a:rPr lang="en-US" smtClean="0"/>
+              <a:rPr lang="en-US"/>
               <a:t>Second level</a:t>
             </a:r>
           </a:p>
           <a:p>
             <a:pPr lvl="2"/>
             <a:r>
-              <a:rPr lang="en-US" smtClean="0"/>
+              <a:rPr lang="en-US"/>
               <a:t>Third level</a:t>
             </a:r>
           </a:p>
           <a:p>
             <a:pPr lvl="3"/>
             <a:r>
-              <a:rPr lang="en-US" smtClean="0"/>
+              <a:rPr lang="en-US"/>
               <a:t>Fourth level</a:t>
             </a:r>
           </a:p>
           <a:p>
             <a:pPr lvl="4"/>
             <a:r>
-              <a:rPr lang="en-US" smtClean="0"/>
+              <a:rPr lang="en-US"/>
               <a:t>Fifth level</a:t>
             </a:r>
-            <a:endParaRPr lang="en-US"/>
           </a:p>
         </p:txBody>
       </p:sp>
@@ -1670,7 +1666,7 @@
           <a:p>
             <a:pPr lvl="0"/>
             <a:r>
-              <a:rPr lang="en-US" smtClean="0"/>
+              <a:rPr lang="en-US"/>
               <a:t>Click to edit Master text styles</a:t>
             </a:r>
           </a:p>
@@ -1726,38 +1722,37 @@
           <a:p>
             <a:pPr lvl="0"/>
             <a:r>
-              <a:rPr lang="en-US" smtClean="0"/>
+              <a:rPr lang="en-US"/>
               <a:t>Click to edit Master text styles</a:t>
             </a:r>
           </a:p>
           <a:p>
             <a:pPr lvl="1"/>
             <a:r>
-              <a:rPr lang="en-US" smtClean="0"/>
+              <a:rPr lang="en-US"/>
               <a:t>Second level</a:t>
             </a:r>
           </a:p>
           <a:p>
             <a:pPr lvl="2"/>
             <a:r>
-              <a:rPr lang="en-US" smtClean="0"/>
+              <a:rPr lang="en-US"/>
               <a:t>Third level</a:t>
             </a:r>
           </a:p>
           <a:p>
             <a:pPr lvl="3"/>
             <a:r>
-              <a:rPr lang="en-US" smtClean="0"/>
+              <a:rPr lang="en-US"/>
               <a:t>Fourth level</a:t>
             </a:r>
           </a:p>
           <a:p>
             <a:pPr lvl="4"/>
             <a:r>
-              <a:rPr lang="en-US" smtClean="0"/>
+              <a:rPr lang="en-US"/>
               <a:t>Fifth level</a:t>
             </a:r>
-            <a:endParaRPr lang="en-US"/>
           </a:p>
         </p:txBody>
       </p:sp>
@@ -1778,7 +1773,7 @@
           <a:p>
             <a:fld id="{5BCAD085-E8A6-8845-BD4E-CB4CCA059FC4}" type="datetimeFigureOut">
               <a:rPr lang="en-US" smtClean="0"/>
-              <a:t>1/27/13</a:t>
+              <a:t>9/1/26</a:t>
             </a:fld>
             <a:endParaRPr lang="en-US"/>
           </a:p>
@@ -1872,10 +1867,9 @@
           <a:lstStyle/>
           <a:p>
             <a:r>
-              <a:rPr lang="en-US" smtClean="0"/>
+              <a:rPr lang="en-US"/>
               <a:t>Click to edit Master title style</a:t>
             </a:r>
-            <a:endParaRPr lang="en-US"/>
           </a:p>
         </p:txBody>
       </p:sp>
@@ -1896,7 +1890,7 @@
           <a:p>
             <a:fld id="{5BCAD085-E8A6-8845-BD4E-CB4CCA059FC4}" type="datetimeFigureOut">
               <a:rPr lang="en-US" smtClean="0"/>
-              <a:t>1/27/13</a:t>
+              <a:t>9/1/26</a:t>
             </a:fld>
             <a:endParaRPr lang="en-US"/>
           </a:p>
@@ -1991,7 +1985,7 @@
           <a:p>
             <a:fld id="{5BCAD085-E8A6-8845-BD4E-CB4CCA059FC4}" type="datetimeFigureOut">
               <a:rPr lang="en-US" smtClean="0"/>
-              <a:t>1/27/13</a:t>
+              <a:t>9/1/26</a:t>
             </a:fld>
             <a:endParaRPr lang="en-US"/>
           </a:p>
@@ -2094,10 +2088,9 @@
           </a:lstStyle>
           <a:p>
             <a:r>
-              <a:rPr lang="en-US" smtClean="0"/>
+              <a:rPr lang="en-US"/>
               <a:t>Click to edit Master title style</a:t>
             </a:r>
-            <a:endParaRPr lang="en-US"/>
           </a:p>
         </p:txBody>
       </p:sp>
@@ -2151,38 +2144,37 @@
           <a:p>
             <a:pPr lvl="0"/>
             <a:r>
-              <a:rPr lang="en-US" smtClean="0"/>
+              <a:rPr lang="en-US"/>
               <a:t>Click to edit Master text styles</a:t>
             </a:r>
           </a:p>
           <a:p>
             <a:pPr lvl="1"/>
             <a:r>
-              <a:rPr lang="en-US" smtClean="0"/>
+              <a:rPr lang="en-US"/>
               <a:t>Second level</a:t>
             </a:r>
           </a:p>
           <a:p>
             <a:pPr lvl="2"/>
             <a:r>
-              <a:rPr lang="en-US" smtClean="0"/>
+              <a:rPr lang="en-US"/>
               <a:t>Third level</a:t>
             </a:r>
           </a:p>
           <a:p>
             <a:pPr lvl="3"/>
             <a:r>
-              <a:rPr lang="en-US" smtClean="0"/>
+              <a:rPr lang="en-US"/>
               <a:t>Fourth level</a:t>
             </a:r>
           </a:p>
           <a:p>
             <a:pPr lvl="4"/>
             <a:r>
-              <a:rPr lang="en-US" smtClean="0"/>
+              <a:rPr lang="en-US"/>
               <a:t>Fifth level</a:t>
             </a:r>
-            <a:endParaRPr lang="en-US"/>
           </a:p>
         </p:txBody>
       </p:sp>
@@ -2245,7 +2237,7 @@
           <a:p>
             <a:pPr lvl="0"/>
             <a:r>
-              <a:rPr lang="en-US" smtClean="0"/>
+              <a:rPr lang="en-US"/>
               <a:t>Click to edit Master text styles</a:t>
             </a:r>
           </a:p>
@@ -2268,7 +2260,7 @@
           <a:p>
             <a:fld id="{5BCAD085-E8A6-8845-BD4E-CB4CCA059FC4}" type="datetimeFigureOut">
               <a:rPr lang="en-US" smtClean="0"/>
-              <a:t>1/27/13</a:t>
+              <a:t>9/1/26</a:t>
             </a:fld>
             <a:endParaRPr lang="en-US"/>
           </a:p>
@@ -2371,10 +2363,9 @@
           </a:lstStyle>
           <a:p>
             <a:r>
-              <a:rPr lang="en-US" smtClean="0"/>
+              <a:rPr lang="en-US"/>
               <a:t>Click to edit Master title style</a:t>
             </a:r>
-            <a:endParaRPr lang="en-US"/>
           </a:p>
         </p:txBody>
       </p:sp>
@@ -2498,7 +2489,7 @@
           <a:p>
             <a:pPr lvl="0"/>
             <a:r>
-              <a:rPr lang="en-US" smtClean="0"/>
+              <a:rPr lang="en-US"/>
               <a:t>Click to edit Master text styles</a:t>
             </a:r>
           </a:p>
@@ -2521,7 +2512,7 @@
           <a:p>
             <a:fld id="{5BCAD085-E8A6-8845-BD4E-CB4CCA059FC4}" type="datetimeFigureOut">
               <a:rPr lang="en-US" smtClean="0"/>
-              <a:t>1/27/13</a:t>
+              <a:t>9/1/26</a:t>
             </a:fld>
             <a:endParaRPr lang="en-US"/>
           </a:p>
@@ -2630,10 +2621,9 @@
           <a:lstStyle/>
           <a:p>
             <a:r>
-              <a:rPr lang="en-US" smtClean="0"/>
+              <a:rPr lang="en-US"/>
               <a:t>Click to edit Master title style</a:t>
             </a:r>
-            <a:endParaRPr lang="en-US"/>
           </a:p>
         </p:txBody>
       </p:sp>
@@ -2664,38 +2654,37 @@
           <a:p>
             <a:pPr lvl="0"/>
             <a:r>
-              <a:rPr lang="en-US" smtClean="0"/>
+              <a:rPr lang="en-US"/>
               <a:t>Click to edit Master text styles</a:t>
             </a:r>
           </a:p>
           <a:p>
             <a:pPr lvl="1"/>
             <a:r>
-              <a:rPr lang="en-US" smtClean="0"/>
+              <a:rPr lang="en-US"/>
               <a:t>Second level</a:t>
             </a:r>
           </a:p>
           <a:p>
             <a:pPr lvl="2"/>
             <a:r>
-              <a:rPr lang="en-US" smtClean="0"/>
+              <a:rPr lang="en-US"/>
               <a:t>Third level</a:t>
             </a:r>
           </a:p>
           <a:p>
             <a:pPr lvl="3"/>
             <a:r>
-              <a:rPr lang="en-US" smtClean="0"/>
+              <a:rPr lang="en-US"/>
               <a:t>Fourth level</a:t>
             </a:r>
           </a:p>
           <a:p>
             <a:pPr lvl="4"/>
             <a:r>
-              <a:rPr lang="en-US" smtClean="0"/>
+              <a:rPr lang="en-US"/>
               <a:t>Fifth level</a:t>
             </a:r>
-            <a:endParaRPr lang="en-US"/>
           </a:p>
         </p:txBody>
       </p:sp>
@@ -2734,7 +2723,7 @@
           <a:p>
             <a:fld id="{5BCAD085-E8A6-8845-BD4E-CB4CCA059FC4}" type="datetimeFigureOut">
               <a:rPr lang="en-US" smtClean="0"/>
-              <a:t>1/27/13</a:t>
+              <a:t>9/1/26</a:t>
             </a:fld>
             <a:endParaRPr lang="en-US"/>
           </a:p>
@@ -3093,7 +3082,7 @@
 </file>
 
 <file path=ppt/slides/slide1.xml><?xml version="1.0" encoding="utf-8"?>
-<p:sld xmlns:a="http://schemas.openxmlformats.org/drawingml/2006/main" xmlns:p="http://schemas.openxmlformats.org/presentationml/2006/main" xmlns:r="http://schemas.openxmlformats.org/officeDocument/2006/relationships">
+<p:sld xmlns:a="http://schemas.openxmlformats.org/drawingml/2006/main" xmlns:r="http://schemas.openxmlformats.org/officeDocument/2006/relationships" xmlns:p="http://schemas.openxmlformats.org/presentationml/2006/main">
   <p:cSld>
     <p:spTree>
       <p:nvGrpSpPr>
@@ -3101,7 +3090,14 @@
         <p:cNvGrpSpPr/>
         <p:nvPr/>
       </p:nvGrpSpPr>
-      <p:grpSpPr/>
+      <p:grpSpPr>
+        <a:xfrm>
+          <a:off x="0" y="0"/>
+          <a:ext cx="0" cy="0"/>
+          <a:chOff x="0" y="0"/>
+          <a:chExt cx="0" cy="0"/>
+        </a:xfrm>
+      </p:grpSpPr>
       <p:sp>
         <p:nvSpPr>
           <p:cNvPr id="2" name="TextBox 1"/>
@@ -3111,7 +3107,7 @@
         <p:spPr>
           <a:xfrm>
             <a:off x="731520" y="2286000"/>
-            <a:ext cx="10698480" cy="1828800"/>
+            <a:ext cx="6817828" cy="1369606"/>
           </a:xfrm>
           <a:prstGeom prst="rect">
             <a:avLst/>
@@ -3125,7 +3121,7 @@
           <a:lstStyle/>
           <a:p>
             <a:r>
-              <a:rPr sz="4600" b="1">
+              <a:rPr sz="4600" b="1" dirty="0">
                 <a:solidFill>
                   <a:srgbClr val="0B5C9E"/>
                 </a:solidFill>
@@ -3135,17 +3131,33 @@
           </a:p>
           <a:p>
             <a:r>
-              <a:rPr sz="2200">
-                <a:solidFill>
-                  <a:srgbClr val="1A1A1A"/>
-                </a:solidFill>
-              </a:rPr>
-              <a:t>Remote task fulfilment &amp; user consultation — and the agent 0 card</a:t>
-            </a:r>
-          </a:p>
-          <a:p>
-            <a:r>
-              <a:rPr sz="1500" i="1">
+              <a:rPr sz="2200" dirty="0">
+                <a:solidFill>
+                  <a:srgbClr val="1A1A1A"/>
+                </a:solidFill>
+              </a:rPr>
+              <a:t>Remote task fulfilment &amp; user consultation —</a:t>
+            </a:r>
+            <a:r>
+              <a:rPr lang="en-US" sz="2200" dirty="0">
+                <a:solidFill>
+                  <a:srgbClr val="1A1A1A"/>
+                </a:solidFill>
+              </a:rPr>
+              <a:t> </a:t>
+            </a:r>
+            <a:r>
+              <a:rPr sz="2200" dirty="0">
+                <a:solidFill>
+                  <a:srgbClr val="1A1A1A"/>
+                </a:solidFill>
+              </a:rPr>
+              <a:t>agent 0 card</a:t>
+            </a:r>
+          </a:p>
+          <a:p>
+            <a:r>
+              <a:rPr sz="1500" i="1" dirty="0">
                 <a:solidFill>
                   <a:srgbClr val="606060"/>
                 </a:solidFill>
@@ -3163,8 +3175,8 @@
 </p:sld>
 </file>
 
-<file path=ppt/slides/slide10.xml><?xml version="1.0" encoding="utf-8"?>
-<p:sld xmlns:a="http://schemas.openxmlformats.org/drawingml/2006/main" xmlns:p="http://schemas.openxmlformats.org/presentationml/2006/main" xmlns:r="http://schemas.openxmlformats.org/officeDocument/2006/relationships">
+<file path=ppt/slides/slide2.xml><?xml version="1.0" encoding="utf-8"?>
+<p:sld xmlns:a="http://schemas.openxmlformats.org/drawingml/2006/main" xmlns:r="http://schemas.openxmlformats.org/officeDocument/2006/relationships" xmlns:p="http://schemas.openxmlformats.org/presentationml/2006/main">
   <p:cSld>
     <p:spTree>
       <p:nvGrpSpPr>
@@ -3172,7 +3184,14 @@
         <p:cNvGrpSpPr/>
         <p:nvPr/>
       </p:nvGrpSpPr>
-      <p:grpSpPr/>
+      <p:grpSpPr>
+        <a:xfrm>
+          <a:off x="0" y="0"/>
+          <a:ext cx="0" cy="0"/>
+          <a:chOff x="0" y="0"/>
+          <a:chExt cx="0" cy="0"/>
+        </a:xfrm>
+      </p:grpSpPr>
       <p:sp>
         <p:nvSpPr>
           <p:cNvPr id="2" name="TextBox 1"/>
@@ -3201,7 +3220,7 @@
                   <a:srgbClr val="0B5C9E"/>
                 </a:solidFill>
               </a:rPr>
-              <a:t>Both skills may talk to the user — about different things</a:t>
+              <a:t>What you are building</a:t>
             </a:r>
           </a:p>
         </p:txBody>
@@ -3214,8 +3233,8 @@
         </p:nvSpPr>
         <p:spPr>
           <a:xfrm>
-            <a:off x="640080" y="1737360"/>
-            <a:ext cx="5303520" cy="457200"/>
+            <a:off x="566928" y="1051560"/>
+            <a:ext cx="11064240" cy="457200"/>
           </a:xfrm>
           <a:prstGeom prst="rect">
             <a:avLst/>
@@ -3229,12 +3248,12 @@
           <a:lstStyle/>
           <a:p>
             <a:r>
-              <a:rPr sz="1700" b="1">
-                <a:solidFill>
-                  <a:srgbClr val="0B5C9E"/>
-                </a:solidFill>
-              </a:rPr>
-              <a:t>fulfill_task</a:t>
+              <a:rPr sz="1500" i="1">
+                <a:solidFill>
+                  <a:srgbClr val="606060"/>
+                </a:solidFill>
+              </a:rPr>
+              <a:t>One A2A server. CUGA FLO is the client.</a:t>
             </a:r>
           </a:p>
         </p:txBody>
@@ -3247,8 +3266,8 @@
         </p:nvSpPr>
         <p:spPr>
           <a:xfrm>
-            <a:off x="640080" y="2286000"/>
-            <a:ext cx="5394960" cy="4206240"/>
+            <a:off x="640080" y="1645920"/>
+            <a:ext cx="10972800" cy="4754880"/>
           </a:xfrm>
           <a:prstGeom prst="rect">
             <a:avLst/>
@@ -3263,180 +3282,76 @@
           <a:p>
             <a:pPr>
               <a:spcAft>
-                <a:spcPts val="600"/>
+                <a:spcPts val="700"/>
               </a:spcAft>
             </a:pPr>
             <a:r>
-              <a:rPr sz="1400">
-                <a:solidFill>
-                  <a:srgbClr val="1A1A1A"/>
-                </a:solidFill>
-              </a:rPr>
-              <a:t>• Asks for: operation parameters — which line item, row, value</a:t>
+              <a:rPr sz="1700" b="1">
+                <a:solidFill>
+                  <a:srgbClr val="1A1A1A"/>
+                </a:solidFill>
+              </a:rPr>
+              <a:t>• One endpoint, one agent card — reached for two purposes:</a:t>
+            </a:r>
+          </a:p>
+          <a:p>
+            <a:pPr lvl="1">
+              <a:spcAft>
+                <a:spcPts val="700"/>
+              </a:spcAft>
+            </a:pPr>
+            <a:r>
+              <a:rPr sz="1500" b="0">
+                <a:solidFill>
+                  <a:srgbClr val="1A1A1A"/>
+                </a:solidFill>
+              </a:rPr>
+              <a:t>– The Excel capability in the business process — when a step needs a spreadsheet touched, the whole step is delegated to you</a:t>
+            </a:r>
+          </a:p>
+          <a:p>
+            <a:pPr lvl="1">
+              <a:spcAft>
+                <a:spcPts val="700"/>
+              </a:spcAft>
+            </a:pPr>
+            <a:r>
+              <a:rPr sz="1500" b="0">
+                <a:solidFill>
+                  <a:srgbClr val="1A1A1A"/>
+                </a:solidFill>
+              </a:rPr>
+              <a:t>– The routing consultant — when a branch depends on what the user wants, you find out which way they prefer</a:t>
             </a:r>
           </a:p>
           <a:p>
             <a:pPr>
               <a:spcAft>
-                <a:spcPts val="600"/>
+                <a:spcPts val="700"/>
               </a:spcAft>
             </a:pPr>
             <a:r>
-              <a:rPr sz="1400">
-                <a:solidFill>
-                  <a:srgbClr val="1A1A1A"/>
-                </a:solidFill>
-              </a:rPr>
-              <a:t>• Why: its instruction carries a 'user escalation:' block naming what is missing</a:t>
+              <a:rPr sz="1700" b="0">
+                <a:solidFill>
+                  <a:srgbClr val="1A1A1A"/>
+                </a:solidFill>
+              </a:rPr>
+              <a:t>• **You do NOT build:** an MCP server, any understanding of BPMN, or any CUGA FLO data structures</a:t>
             </a:r>
           </a:p>
           <a:p>
             <a:pPr>
               <a:spcAft>
-                <a:spcPts val="600"/>
+                <a:spcPts val="700"/>
               </a:spcAft>
             </a:pPr>
             <a:r>
-              <a:rPr sz="1400">
-                <a:solidFill>
-                  <a:srgbClr val="1A1A1A"/>
-                </a:solidFill>
-              </a:rPr>
-              <a:t>• Then: performs the operation and reports what it did</a:t>
-            </a:r>
-          </a:p>
-        </p:txBody>
-      </p:sp>
-      <p:sp>
-        <p:nvSpPr>
-          <p:cNvPr id="5" name="TextBox 4"/>
-          <p:cNvSpPr txBox="1"/>
-          <p:nvPr/>
-        </p:nvSpPr>
-        <p:spPr>
-          <a:xfrm>
-            <a:off x="6400800" y="1737360"/>
-            <a:ext cx="5303520" cy="457200"/>
-          </a:xfrm>
-          <a:prstGeom prst="rect">
-            <a:avLst/>
-          </a:prstGeom>
-          <a:noFill/>
-        </p:spPr>
-        <p:txBody>
-          <a:bodyPr wrap="none">
-            <a:spAutoFit/>
-          </a:bodyPr>
-          <a:lstStyle/>
-          <a:p>
-            <a:r>
               <a:rPr sz="1700" b="1">
                 <a:solidFill>
-                  <a:srgbClr val="0B5C9E"/>
-                </a:solidFill>
-              </a:rPr>
-              <a:t>elicit_user_preference</a:t>
-            </a:r>
-          </a:p>
-        </p:txBody>
-      </p:sp>
-      <p:sp>
-        <p:nvSpPr>
-          <p:cNvPr id="6" name="TextBox 5"/>
-          <p:cNvSpPr txBox="1"/>
-          <p:nvPr/>
-        </p:nvSpPr>
-        <p:spPr>
-          <a:xfrm>
-            <a:off x="6400800" y="2286000"/>
-            <a:ext cx="5394960" cy="4206240"/>
-          </a:xfrm>
-          <a:prstGeom prst="rect">
-            <a:avLst/>
-          </a:prstGeom>
-          <a:noFill/>
-        </p:spPr>
-        <p:txBody>
-          <a:bodyPr wrap="square">
-            <a:spAutoFit/>
-          </a:bodyPr>
-          <a:lstStyle/>
-          <a:p>
-            <a:pPr>
-              <a:spcAft>
-                <a:spcPts val="600"/>
-              </a:spcAft>
-            </a:pPr>
-            <a:r>
-              <a:rPr sz="1400">
-                <a:solidFill>
-                  <a:srgbClr val="1A1A1A"/>
-                </a:solidFill>
-              </a:rPr>
-              <a:t>• Asks for: which route the process takes at a branch point</a:t>
-            </a:r>
-          </a:p>
-          <a:p>
-            <a:pPr>
-              <a:spcAft>
-                <a:spcPts val="600"/>
-              </a:spcAft>
-            </a:pPr>
-            <a:r>
-              <a:rPr sz="1400">
-                <a:solidFill>
-                  <a:srgbClr val="1A1A1A"/>
-                </a:solidFill>
-              </a:rPr>
-              <a:t>• Why: that IS the request; there is nothing else to it</a:t>
-            </a:r>
-          </a:p>
-          <a:p>
-            <a:pPr>
-              <a:spcAft>
-                <a:spcPts val="600"/>
-              </a:spcAft>
-            </a:pPr>
-            <a:r>
-              <a:rPr sz="1400">
-                <a:solidFill>
-                  <a:srgbClr val="1A1A1A"/>
-                </a:solidFill>
-              </a:rPr>
-              <a:t>• Then: reports the preference; nothing is changed</a:t>
-            </a:r>
-          </a:p>
-        </p:txBody>
-      </p:sp>
-      <p:sp>
-        <p:nvSpPr>
-          <p:cNvPr id="7" name="TextBox 6"/>
-          <p:cNvSpPr txBox="1"/>
-          <p:nvPr/>
-        </p:nvSpPr>
-        <p:spPr>
-          <a:xfrm>
-            <a:off x="640080" y="5760720"/>
-            <a:ext cx="10972800" cy="731520"/>
-          </a:xfrm>
-          <a:prstGeom prst="rect">
-            <a:avLst/>
-          </a:prstGeom>
-          <a:noFill/>
-        </p:spPr>
-        <p:txBody>
-          <a:bodyPr wrap="none">
-            <a:spAutoFit/>
-          </a:bodyPr>
-          <a:lstStyle/>
-          <a:p>
-            <a:r>
-              <a:rPr sz="1400" i="1">
-                <a:solidFill>
-                  <a:srgbClr val="606060"/>
-                </a:solidFill>
-              </a:rPr>
-              <a:t>Consultation is only ever "which of these ways should we go?" — never a request for a parameter.</a:t>
+                  <a:srgbClr val="1A1A1A"/>
+                </a:solidFill>
+              </a:rPr>
+              <a:t>• Text in, text out.</a:t>
             </a:r>
           </a:p>
         </p:txBody>
@@ -3449,8 +3364,8 @@
 </p:sld>
 </file>
 
-<file path=ppt/slides/slide11.xml><?xml version="1.0" encoding="utf-8"?>
-<p:sld xmlns:a="http://schemas.openxmlformats.org/drawingml/2006/main" xmlns:p="http://schemas.openxmlformats.org/presentationml/2006/main" xmlns:r="http://schemas.openxmlformats.org/officeDocument/2006/relationships">
+<file path=ppt/slides/slide3.xml><?xml version="1.0" encoding="utf-8"?>
+<p:sld xmlns:a="http://schemas.openxmlformats.org/drawingml/2006/main" xmlns:r="http://schemas.openxmlformats.org/officeDocument/2006/relationships" xmlns:p="http://schemas.openxmlformats.org/presentationml/2006/main">
   <p:cSld>
     <p:spTree>
       <p:nvGrpSpPr>
@@ -3458,7 +3373,1107 @@
         <p:cNvGrpSpPr/>
         <p:nvPr/>
       </p:nvGrpSpPr>
-      <p:grpSpPr/>
+      <p:grpSpPr>
+        <a:xfrm>
+          <a:off x="0" y="0"/>
+          <a:ext cx="0" cy="0"/>
+          <a:chOff x="0" y="0"/>
+          <a:chExt cx="0" cy="0"/>
+        </a:xfrm>
+      </p:grpSpPr>
+      <p:sp>
+        <p:nvSpPr>
+          <p:cNvPr id="2" name="TextBox 1"/>
+          <p:cNvSpPr txBox="1"/>
+          <p:nvPr/>
+        </p:nvSpPr>
+        <p:spPr>
+          <a:xfrm>
+            <a:off x="548640" y="365760"/>
+            <a:ext cx="11064240" cy="822960"/>
+          </a:xfrm>
+          <a:prstGeom prst="rect">
+            <a:avLst/>
+          </a:prstGeom>
+          <a:noFill/>
+        </p:spPr>
+        <p:txBody>
+          <a:bodyPr wrap="none">
+            <a:spAutoFit/>
+          </a:bodyPr>
+          <a:lstStyle/>
+          <a:p>
+            <a:r>
+              <a:rPr sz="3000" b="1">
+                <a:solidFill>
+                  <a:srgbClr val="0B5C9E"/>
+                </a:solidFill>
+              </a:rPr>
+              <a:t>One service, two capabilities — not two services</a:t>
+            </a:r>
+          </a:p>
+        </p:txBody>
+      </p:sp>
+      <p:sp>
+        <p:nvSpPr>
+          <p:cNvPr id="3" name="Rectangle 2"/>
+          <p:cNvSpPr/>
+          <p:nvPr/>
+        </p:nvSpPr>
+        <p:spPr>
+          <a:xfrm>
+            <a:off x="640080" y="1554480"/>
+            <a:ext cx="10972800" cy="2377440"/>
+          </a:xfrm>
+          <a:prstGeom prst="rect">
+            <a:avLst/>
+          </a:prstGeom>
+          <a:solidFill>
+            <a:srgbClr val="F2F3F5"/>
+          </a:solidFill>
+          <a:ln>
+            <a:solidFill>
+              <a:srgbClr val="D0D3D8"/>
+            </a:solidFill>
+          </a:ln>
+        </p:spPr>
+        <p:style>
+          <a:lnRef idx="1">
+            <a:schemeClr val="accent1"/>
+          </a:lnRef>
+          <a:fillRef idx="3">
+            <a:schemeClr val="accent1"/>
+          </a:fillRef>
+          <a:effectRef idx="2">
+            <a:schemeClr val="accent1"/>
+          </a:effectRef>
+          <a:fontRef idx="minor">
+            <a:schemeClr val="lt1"/>
+          </a:fontRef>
+        </p:style>
+        <p:txBody>
+          <a:bodyPr wrap="square" lIns="182880" tIns="137160" rIns="182880" bIns="137160" rtlCol="0" anchor="ctr"/>
+          <a:lstStyle/>
+          <a:p>
+            <a:pPr algn="ctr"/>
+            <a:r>
+              <a:rPr sz="1200" dirty="0">
+                <a:solidFill>
+                  <a:srgbClr val="1A1A1A"/>
+                </a:solidFill>
+                <a:latin typeface="Courier New"/>
+              </a:rPr>
+              <a:t>GET /.well-known/agent-</a:t>
+            </a:r>
+            <a:r>
+              <a:rPr sz="1200" dirty="0" err="1">
+                <a:solidFill>
+                  <a:srgbClr val="1A1A1A"/>
+                </a:solidFill>
+                <a:latin typeface="Courier New"/>
+              </a:rPr>
+              <a:t>card.json</a:t>
+            </a:r>
+            <a:r>
+              <a:rPr sz="1200" dirty="0">
+                <a:solidFill>
+                  <a:srgbClr val="1A1A1A"/>
+                </a:solidFill>
+                <a:latin typeface="Courier New"/>
+              </a:rPr>
+              <a:t>  --&gt;  the card (advertises what you can do)</a:t>
+            </a:r>
+          </a:p>
+          <a:p>
+            <a:endParaRPr sz="1200" dirty="0">
+              <a:solidFill>
+                <a:srgbClr val="1A1A1A"/>
+              </a:solidFill>
+              <a:latin typeface="Courier New"/>
+            </a:endParaRPr>
+          </a:p>
+          <a:p>
+            <a:r>
+              <a:rPr sz="1200" dirty="0">
+                <a:solidFill>
+                  <a:srgbClr val="1A1A1A"/>
+                </a:solidFill>
+                <a:latin typeface="Courier New"/>
+              </a:rPr>
+              <a:t>POST message/send  --&gt;  </a:t>
+            </a:r>
+            <a:r>
+              <a:rPr sz="1200" dirty="0" err="1">
+                <a:solidFill>
+                  <a:srgbClr val="1A1A1A"/>
+                </a:solidFill>
+                <a:latin typeface="Courier New"/>
+              </a:rPr>
+              <a:t>AgentExecutor.execute</a:t>
+            </a:r>
+            <a:r>
+              <a:rPr sz="1200" dirty="0">
+                <a:solidFill>
+                  <a:srgbClr val="1A1A1A"/>
+                </a:solidFill>
+                <a:latin typeface="Courier New"/>
+              </a:rPr>
+              <a:t>(context, </a:t>
+            </a:r>
+            <a:r>
+              <a:rPr sz="1200" dirty="0" err="1">
+                <a:solidFill>
+                  <a:srgbClr val="1A1A1A"/>
+                </a:solidFill>
+                <a:latin typeface="Courier New"/>
+              </a:rPr>
+              <a:t>event_queue</a:t>
+            </a:r>
+            <a:r>
+              <a:rPr sz="1200" dirty="0">
+                <a:solidFill>
+                  <a:srgbClr val="1A1A1A"/>
+                </a:solidFill>
+                <a:latin typeface="Courier New"/>
+              </a:rPr>
+              <a:t>)   &lt;- one entry point</a:t>
+            </a:r>
+          </a:p>
+          <a:p>
+            <a:r>
+              <a:rPr sz="1200" dirty="0">
+                <a:solidFill>
+                  <a:srgbClr val="1A1A1A"/>
+                </a:solidFill>
+                <a:latin typeface="Courier New"/>
+              </a:rPr>
+              <a:t>                          |  read metadata["variables"]["role"]</a:t>
+            </a:r>
+          </a:p>
+          <a:p>
+            <a:r>
+              <a:rPr sz="1200" dirty="0">
+                <a:solidFill>
+                  <a:srgbClr val="1A1A1A"/>
+                </a:solidFill>
+                <a:latin typeface="Courier New"/>
+              </a:rPr>
+              <a:t>                          |</a:t>
+            </a:r>
+          </a:p>
+          <a:p>
+            <a:r>
+              <a:rPr sz="1200" dirty="0">
+                <a:solidFill>
+                  <a:srgbClr val="1A1A1A"/>
+                </a:solidFill>
+                <a:latin typeface="Courier New"/>
+              </a:rPr>
+              <a:t>                          +- "</a:t>
+            </a:r>
+            <a:r>
+              <a:rPr sz="1200" dirty="0" err="1">
+                <a:solidFill>
+                  <a:srgbClr val="1A1A1A"/>
+                </a:solidFill>
+                <a:latin typeface="Courier New"/>
+              </a:rPr>
+              <a:t>fulfill_task</a:t>
+            </a:r>
+            <a:r>
+              <a:rPr sz="1200" dirty="0">
+                <a:solidFill>
+                  <a:srgbClr val="1A1A1A"/>
+                </a:solidFill>
+                <a:latin typeface="Courier New"/>
+              </a:rPr>
+              <a:t>"            -&gt; do the spreadsheet work</a:t>
+            </a:r>
+          </a:p>
+          <a:p>
+            <a:r>
+              <a:rPr sz="1200" dirty="0">
+                <a:solidFill>
+                  <a:srgbClr val="1A1A1A"/>
+                </a:solidFill>
+                <a:latin typeface="Courier New"/>
+              </a:rPr>
+              <a:t>                          +- "</a:t>
+            </a:r>
+            <a:r>
+              <a:rPr sz="1200" dirty="0" err="1">
+                <a:solidFill>
+                  <a:srgbClr val="1A1A1A"/>
+                </a:solidFill>
+                <a:latin typeface="Courier New"/>
+              </a:rPr>
+              <a:t>elicit_user_preference</a:t>
+            </a:r>
+            <a:r>
+              <a:rPr sz="1200" dirty="0">
+                <a:solidFill>
+                  <a:srgbClr val="1A1A1A"/>
+                </a:solidFill>
+                <a:latin typeface="Courier New"/>
+              </a:rPr>
+              <a:t>"  -&gt; interview the user</a:t>
+            </a:r>
+            <a:r>
+              <a:rPr lang="en-US" sz="1200" dirty="0">
+                <a:solidFill>
+                  <a:srgbClr val="1A1A1A"/>
+                </a:solidFill>
+                <a:latin typeface="Courier New"/>
+              </a:rPr>
+              <a:t> (routing </a:t>
+            </a:r>
+            <a:r>
+              <a:rPr lang="en-US" sz="1200" dirty="0" err="1">
+                <a:solidFill>
+                  <a:srgbClr val="1A1A1A"/>
+                </a:solidFill>
+                <a:latin typeface="Courier New"/>
+              </a:rPr>
+              <a:t>pref</a:t>
+            </a:r>
+            <a:r>
+              <a:rPr lang="en-US" sz="1200" dirty="0">
+                <a:solidFill>
+                  <a:srgbClr val="1A1A1A"/>
+                </a:solidFill>
+                <a:latin typeface="Courier New"/>
+              </a:rPr>
+              <a:t>)</a:t>
+            </a:r>
+            <a:r>
+              <a:rPr sz="1200" dirty="0">
+                <a:solidFill>
+                  <a:srgbClr val="1A1A1A"/>
+                </a:solidFill>
+                <a:latin typeface="Courier New"/>
+              </a:rPr>
+              <a:t>, report back</a:t>
+            </a:r>
+          </a:p>
+        </p:txBody>
+      </p:sp>
+    </p:spTree>
+  </p:cSld>
+  <p:clrMapOvr>
+    <a:masterClrMapping/>
+  </p:clrMapOvr>
+</p:sld>
+</file>
+
+<file path=ppt/slides/slide4.xml><?xml version="1.0" encoding="utf-8"?>
+<p:sld xmlns:a="http://schemas.openxmlformats.org/drawingml/2006/main" xmlns:r="http://schemas.openxmlformats.org/officeDocument/2006/relationships" xmlns:p="http://schemas.openxmlformats.org/presentationml/2006/main">
+  <p:cSld>
+    <p:spTree>
+      <p:nvGrpSpPr>
+        <p:cNvPr id="1" name=""/>
+        <p:cNvGrpSpPr/>
+        <p:nvPr/>
+      </p:nvGrpSpPr>
+      <p:grpSpPr>
+        <a:xfrm>
+          <a:off x="0" y="0"/>
+          <a:ext cx="0" cy="0"/>
+          <a:chOff x="0" y="0"/>
+          <a:chExt cx="0" cy="0"/>
+        </a:xfrm>
+      </p:grpSpPr>
+      <p:sp>
+        <p:nvSpPr>
+          <p:cNvPr id="2" name="TextBox 1"/>
+          <p:cNvSpPr txBox="1"/>
+          <p:nvPr/>
+        </p:nvSpPr>
+        <p:spPr>
+          <a:xfrm>
+            <a:off x="548640" y="365760"/>
+            <a:ext cx="11064240" cy="822960"/>
+          </a:xfrm>
+          <a:prstGeom prst="rect">
+            <a:avLst/>
+          </a:prstGeom>
+          <a:noFill/>
+        </p:spPr>
+        <p:txBody>
+          <a:bodyPr wrap="none">
+            <a:spAutoFit/>
+          </a:bodyPr>
+          <a:lstStyle/>
+          <a:p>
+            <a:r>
+              <a:rPr sz="3000" b="1">
+                <a:solidFill>
+                  <a:srgbClr val="0B5C9E"/>
+                </a:solidFill>
+              </a:rPr>
+              <a:t>The agent card</a:t>
+            </a:r>
+          </a:p>
+        </p:txBody>
+      </p:sp>
+      <p:sp>
+        <p:nvSpPr>
+          <p:cNvPr id="3" name="TextBox 2"/>
+          <p:cNvSpPr txBox="1"/>
+          <p:nvPr/>
+        </p:nvSpPr>
+        <p:spPr>
+          <a:xfrm>
+            <a:off x="566928" y="1051560"/>
+            <a:ext cx="11064240" cy="457200"/>
+          </a:xfrm>
+          <a:prstGeom prst="rect">
+            <a:avLst/>
+          </a:prstGeom>
+          <a:noFill/>
+        </p:spPr>
+        <p:txBody>
+          <a:bodyPr wrap="none">
+            <a:spAutoFit/>
+          </a:bodyPr>
+          <a:lstStyle/>
+          <a:p>
+            <a:r>
+              <a:rPr sz="1500" i="1">
+                <a:solidFill>
+                  <a:srgbClr val="606060"/>
+                </a:solidFill>
+              </a:rPr>
+              <a:t>name and description are injected into the deciding agent's prompt — not documentation</a:t>
+            </a:r>
+          </a:p>
+        </p:txBody>
+      </p:sp>
+      <p:sp>
+        <p:nvSpPr>
+          <p:cNvPr id="4" name="Rectangle 3"/>
+          <p:cNvSpPr/>
+          <p:nvPr/>
+        </p:nvSpPr>
+        <p:spPr>
+          <a:xfrm>
+            <a:off x="640080" y="1554480"/>
+            <a:ext cx="10972800" cy="4754880"/>
+          </a:xfrm>
+          <a:prstGeom prst="rect">
+            <a:avLst/>
+          </a:prstGeom>
+          <a:solidFill>
+            <a:srgbClr val="F2F3F5"/>
+          </a:solidFill>
+          <a:ln>
+            <a:solidFill>
+              <a:srgbClr val="D0D3D8"/>
+            </a:solidFill>
+          </a:ln>
+        </p:spPr>
+        <p:style>
+          <a:lnRef idx="1">
+            <a:schemeClr val="accent1"/>
+          </a:lnRef>
+          <a:fillRef idx="3">
+            <a:schemeClr val="accent1"/>
+          </a:fillRef>
+          <a:effectRef idx="2">
+            <a:schemeClr val="accent1"/>
+          </a:effectRef>
+          <a:fontRef idx="minor">
+            <a:schemeClr val="lt1"/>
+          </a:fontRef>
+        </p:style>
+        <p:txBody>
+          <a:bodyPr wrap="square" lIns="182880" tIns="137160" rIns="182880" bIns="137160" rtlCol="0" anchor="ctr"/>
+          <a:lstStyle/>
+          <a:p>
+            <a:pPr algn="ctr"/>
+            <a:r>
+              <a:rPr sz="1200" dirty="0">
+                <a:solidFill>
+                  <a:srgbClr val="1A1A1A"/>
+                </a:solidFill>
+                <a:latin typeface="Courier New"/>
+              </a:rPr>
+              <a:t>{</a:t>
+            </a:r>
+          </a:p>
+          <a:p>
+            <a:r>
+              <a:rPr sz="1200" dirty="0">
+                <a:solidFill>
+                  <a:srgbClr val="1A1A1A"/>
+                </a:solidFill>
+                <a:latin typeface="Courier New"/>
+              </a:rPr>
+              <a:t>  "name": "agent0",</a:t>
+            </a:r>
+          </a:p>
+          <a:p>
+            <a:r>
+              <a:rPr sz="1200" dirty="0">
+                <a:solidFill>
+                  <a:srgbClr val="1A1A1A"/>
+                </a:solidFill>
+                <a:latin typeface="Courier New"/>
+              </a:rPr>
+              <a:t>  "description": "Performs retrieve, update and function/macro operations on Excel</a:t>
+            </a:r>
+          </a:p>
+          <a:p>
+            <a:r>
+              <a:rPr sz="1200" dirty="0">
+                <a:solidFill>
+                  <a:srgbClr val="1A1A1A"/>
+                </a:solidFill>
+                <a:latin typeface="Courier New"/>
+              </a:rPr>
+              <a:t>    spreadsheets, asking the user for any operation parameters the request does not</a:t>
+            </a:r>
+          </a:p>
+          <a:p>
+            <a:r>
+              <a:rPr sz="1200" dirty="0">
+                <a:solidFill>
+                  <a:srgbClr val="1A1A1A"/>
+                </a:solidFill>
+                <a:latin typeface="Courier New"/>
+              </a:rPr>
+              <a:t>    supply and handling dialogs those operations raise. Separately, reports the user's</a:t>
+            </a:r>
+          </a:p>
+          <a:p>
+            <a:r>
+              <a:rPr sz="1200" dirty="0">
+                <a:solidFill>
+                  <a:srgbClr val="1A1A1A"/>
+                </a:solidFill>
+                <a:latin typeface="Courier New"/>
+              </a:rPr>
+              <a:t>    preference between alternative routes when the process reaches a decision point.",</a:t>
+            </a:r>
+          </a:p>
+          <a:p>
+            <a:r>
+              <a:rPr sz="1200" dirty="0">
+                <a:solidFill>
+                  <a:srgbClr val="1A1A1A"/>
+                </a:solidFill>
+                <a:latin typeface="Courier New"/>
+              </a:rPr>
+              <a:t>  "version": "1.0.0",</a:t>
+            </a:r>
+          </a:p>
+          <a:p>
+            <a:r>
+              <a:rPr sz="1200" dirty="0">
+                <a:solidFill>
+                  <a:srgbClr val="1A1A1A"/>
+                </a:solidFill>
+                <a:latin typeface="Courier New"/>
+              </a:rPr>
+              <a:t>  "capabilities": { "streaming": false, "</a:t>
+            </a:r>
+            <a:r>
+              <a:rPr sz="1200" dirty="0" err="1">
+                <a:solidFill>
+                  <a:srgbClr val="1A1A1A"/>
+                </a:solidFill>
+                <a:latin typeface="Courier New"/>
+              </a:rPr>
+              <a:t>push_notifications</a:t>
+            </a:r>
+            <a:r>
+              <a:rPr sz="1200" dirty="0">
+                <a:solidFill>
+                  <a:srgbClr val="1A1A1A"/>
+                </a:solidFill>
+                <a:latin typeface="Courier New"/>
+              </a:rPr>
+              <a:t>": false },</a:t>
+            </a:r>
+          </a:p>
+          <a:p>
+            <a:r>
+              <a:rPr sz="1200" dirty="0">
+                <a:solidFill>
+                  <a:srgbClr val="1A1A1A"/>
+                </a:solidFill>
+                <a:latin typeface="Courier New"/>
+              </a:rPr>
+              <a:t>  "skills": [</a:t>
+            </a:r>
+          </a:p>
+          <a:p>
+            <a:r>
+              <a:rPr sz="1200" dirty="0">
+                <a:solidFill>
+                  <a:srgbClr val="1A1A1A"/>
+                </a:solidFill>
+                <a:latin typeface="Courier New"/>
+              </a:rPr>
+              <a:t>    { "id": "</a:t>
+            </a:r>
+            <a:r>
+              <a:rPr sz="1200" dirty="0" err="1">
+                <a:solidFill>
+                  <a:srgbClr val="1A1A1A"/>
+                </a:solidFill>
+                <a:latin typeface="Courier New"/>
+              </a:rPr>
+              <a:t>fulfill_task</a:t>
+            </a:r>
+            <a:r>
+              <a:rPr sz="1200" dirty="0">
+                <a:solidFill>
+                  <a:srgbClr val="1A1A1A"/>
+                </a:solidFill>
+                <a:latin typeface="Courier New"/>
+              </a:rPr>
+              <a:t>",            "name": "Perform a spreadsheet operation",  ... },</a:t>
+            </a:r>
+          </a:p>
+          <a:p>
+            <a:r>
+              <a:rPr sz="1200" dirty="0">
+                <a:solidFill>
+                  <a:srgbClr val="1A1A1A"/>
+                </a:solidFill>
+                <a:latin typeface="Courier New"/>
+              </a:rPr>
+              <a:t>    { "id": "</a:t>
+            </a:r>
+            <a:r>
+              <a:rPr sz="1200" dirty="0" err="1">
+                <a:solidFill>
+                  <a:srgbClr val="1A1A1A"/>
+                </a:solidFill>
+                <a:latin typeface="Courier New"/>
+              </a:rPr>
+              <a:t>elicit_user_preference</a:t>
+            </a:r>
+            <a:r>
+              <a:rPr sz="1200" dirty="0">
+                <a:solidFill>
+                  <a:srgbClr val="1A1A1A"/>
+                </a:solidFill>
+                <a:latin typeface="Courier New"/>
+              </a:rPr>
+              <a:t>",  "name": "Ask the user which way to go",     ... }</a:t>
+            </a:r>
+          </a:p>
+          <a:p>
+            <a:r>
+              <a:rPr sz="1200" dirty="0">
+                <a:solidFill>
+                  <a:srgbClr val="1A1A1A"/>
+                </a:solidFill>
+                <a:latin typeface="Courier New"/>
+              </a:rPr>
+              <a:t>  ]</a:t>
+            </a:r>
+          </a:p>
+          <a:p>
+            <a:r>
+              <a:rPr sz="1200" dirty="0">
+                <a:solidFill>
+                  <a:srgbClr val="1A1A1A"/>
+                </a:solidFill>
+                <a:latin typeface="Courier New"/>
+              </a:rPr>
+              <a:t>}</a:t>
+            </a:r>
+          </a:p>
+          <a:p>
+            <a:endParaRPr sz="1200" dirty="0">
+              <a:solidFill>
+                <a:srgbClr val="1A1A1A"/>
+              </a:solidFill>
+              <a:latin typeface="Courier New"/>
+            </a:endParaRPr>
+          </a:p>
+        </p:txBody>
+      </p:sp>
+    </p:spTree>
+  </p:cSld>
+  <p:clrMapOvr>
+    <a:masterClrMapping/>
+  </p:clrMapOvr>
+</p:sld>
+</file>
+
+<file path=ppt/slides/slide5.xml><?xml version="1.0" encoding="utf-8"?>
+<p:sld xmlns:a="http://schemas.openxmlformats.org/drawingml/2006/main" xmlns:r="http://schemas.openxmlformats.org/officeDocument/2006/relationships" xmlns:p="http://schemas.openxmlformats.org/presentationml/2006/main">
+  <p:cSld>
+    <p:spTree>
+      <p:nvGrpSpPr>
+        <p:cNvPr id="1" name=""/>
+        <p:cNvGrpSpPr/>
+        <p:nvPr/>
+      </p:nvGrpSpPr>
+      <p:grpSpPr>
+        <a:xfrm>
+          <a:off x="0" y="0"/>
+          <a:ext cx="0" cy="0"/>
+          <a:chOff x="0" y="0"/>
+          <a:chExt cx="0" cy="0"/>
+        </a:xfrm>
+      </p:grpSpPr>
+      <p:sp>
+        <p:nvSpPr>
+          <p:cNvPr id="2" name="TextBox 1"/>
+          <p:cNvSpPr txBox="1"/>
+          <p:nvPr/>
+        </p:nvSpPr>
+        <p:spPr>
+          <a:xfrm>
+            <a:off x="548640" y="365760"/>
+            <a:ext cx="11064240" cy="822960"/>
+          </a:xfrm>
+          <a:prstGeom prst="rect">
+            <a:avLst/>
+          </a:prstGeom>
+          <a:noFill/>
+        </p:spPr>
+        <p:txBody>
+          <a:bodyPr wrap="none">
+            <a:spAutoFit/>
+          </a:bodyPr>
+          <a:lstStyle/>
+          <a:p>
+            <a:r>
+              <a:rPr sz="3000" b="1">
+                <a:solidFill>
+                  <a:srgbClr val="0B5C9E"/>
+                </a:solidFill>
+              </a:rPr>
+              <a:t>Skill: fulfill_task</a:t>
+            </a:r>
+          </a:p>
+        </p:txBody>
+      </p:sp>
+      <p:sp>
+        <p:nvSpPr>
+          <p:cNvPr id="3" name="TextBox 2"/>
+          <p:cNvSpPr txBox="1"/>
+          <p:nvPr/>
+        </p:nvSpPr>
+        <p:spPr>
+          <a:xfrm>
+            <a:off x="566928" y="1051560"/>
+            <a:ext cx="11064240" cy="457200"/>
+          </a:xfrm>
+          <a:prstGeom prst="rect">
+            <a:avLst/>
+          </a:prstGeom>
+          <a:noFill/>
+        </p:spPr>
+        <p:txBody>
+          <a:bodyPr wrap="none">
+            <a:spAutoFit/>
+          </a:bodyPr>
+          <a:lstStyle/>
+          <a:p>
+            <a:r>
+              <a:rPr sz="1500" i="1">
+                <a:solidFill>
+                  <a:srgbClr val="606060"/>
+                </a:solidFill>
+              </a:rPr>
+              <a:t>One request type, three operations you distinguish from the statement alone</a:t>
+            </a:r>
+          </a:p>
+        </p:txBody>
+      </p:sp>
+      <p:sp>
+        <p:nvSpPr>
+          <p:cNvPr id="4" name="TextBox 3"/>
+          <p:cNvSpPr txBox="1"/>
+          <p:nvPr/>
+        </p:nvSpPr>
+        <p:spPr>
+          <a:xfrm>
+            <a:off x="640080" y="1645920"/>
+            <a:ext cx="10972800" cy="4754880"/>
+          </a:xfrm>
+          <a:prstGeom prst="rect">
+            <a:avLst/>
+          </a:prstGeom>
+          <a:noFill/>
+        </p:spPr>
+        <p:txBody>
+          <a:bodyPr wrap="square">
+            <a:spAutoFit/>
+          </a:bodyPr>
+          <a:lstStyle/>
+          <a:p>
+            <a:pPr>
+              <a:spcAft>
+                <a:spcPts val="700"/>
+              </a:spcAft>
+            </a:pPr>
+            <a:r>
+              <a:rPr sz="1700" b="0">
+                <a:solidFill>
+                  <a:srgbClr val="1A1A1A"/>
+                </a:solidFill>
+              </a:rPr>
+              <a:t>• **RETRIEVE** — read a table, cells, or a column across a row range; report that it was retrieved</a:t>
+            </a:r>
+          </a:p>
+          <a:p>
+            <a:pPr>
+              <a:spcAft>
+                <a:spcPts val="700"/>
+              </a:spcAft>
+            </a:pPr>
+            <a:r>
+              <a:rPr sz="1700" b="0">
+                <a:solidFill>
+                  <a:srgbClr val="1A1A1A"/>
+                </a:solidFill>
+              </a:rPr>
+              <a:t>• **UPDATE** — write values into cells / a column for identified rows; answer any confirmation or validation dialogs raised</a:t>
+            </a:r>
+          </a:p>
+          <a:p>
+            <a:pPr>
+              <a:spcAft>
+                <a:spcPts val="700"/>
+              </a:spcAft>
+            </a:pPr>
+            <a:r>
+              <a:rPr sz="1700" b="0">
+                <a:solidFill>
+                  <a:srgbClr val="1A1A1A"/>
+                </a:solidFill>
+              </a:rPr>
+              <a:t>• **RUN FUNCTION** — execute a named function, macro or bot routine; report its outcome (including failures)</a:t>
+            </a:r>
+          </a:p>
+          <a:p>
+            <a:pPr>
+              <a:spcAft>
+                <a:spcPts val="700"/>
+              </a:spcAft>
+            </a:pPr>
+            <a:r>
+              <a:rPr sz="1700" b="1">
+                <a:solidFill>
+                  <a:srgbClr val="1A1A1A"/>
+                </a:solidFill>
+              </a:rPr>
+              <a:t>• The statement carries the operation type — CUGA FLO sends a goal, not a typed call. Your intent parsing is load-bearing.</a:t>
+            </a:r>
+          </a:p>
+          <a:p>
+            <a:pPr lvl="1">
+              <a:spcAft>
+                <a:spcPts val="700"/>
+              </a:spcAft>
+            </a:pPr>
+            <a:r>
+              <a:rPr sz="1500" b="0">
+                <a:solidFill>
+                  <a:srgbClr val="1A1A1A"/>
+                </a:solidFill>
+              </a:rPr>
+              <a:t>– A statement that does not clearly indicate one of the three: fail, do not guess</a:t>
+            </a:r>
+          </a:p>
+          <a:p>
+            <a:pPr>
+              <a:spcAft>
+                <a:spcPts val="700"/>
+              </a:spcAft>
+            </a:pPr>
+            <a:r>
+              <a:rPr sz="1700" b="1">
+                <a:solidFill>
+                  <a:srgbClr val="1A1A1A"/>
+                </a:solidFill>
+              </a:rPr>
+              <a:t>• A 'user escalation:' block may name parameters you must obtain from the user before proceeding</a:t>
+            </a:r>
+          </a:p>
+          <a:p>
+            <a:pPr lvl="1">
+              <a:spcAft>
+                <a:spcPts val="700"/>
+              </a:spcAft>
+            </a:pPr>
+            <a:r>
+              <a:rPr sz="1500" b="0">
+                <a:solidFill>
+                  <a:srgbClr val="1A1A1A"/>
+                </a:solidFill>
+              </a:rPr>
+              <a:t>– Escalation block present -&gt; ask the user, then act.   No block, parameter missing -&gt; fail with what was missing.</a:t>
+            </a:r>
+          </a:p>
+          <a:p>
+            <a:pPr>
+              <a:spcAft>
+                <a:spcPts val="700"/>
+              </a:spcAft>
+            </a:pPr>
+            <a:r>
+              <a:rPr sz="1700" b="0">
+                <a:solidFill>
+                  <a:srgbClr val="1A1A1A"/>
+                </a:solidFill>
+              </a:rPr>
+              <a:t>• **Reply with the outcome, not the payload** — one line that reads well in a process trace; no tables or row dumps</a:t>
+            </a:r>
+          </a:p>
+        </p:txBody>
+      </p:sp>
+    </p:spTree>
+  </p:cSld>
+  <p:clrMapOvr>
+    <a:masterClrMapping/>
+  </p:clrMapOvr>
+</p:sld>
+</file>
+
+<file path=ppt/slides/slide6.xml><?xml version="1.0" encoding="utf-8"?>
+<p:sld xmlns:a="http://schemas.openxmlformats.org/drawingml/2006/main" xmlns:r="http://schemas.openxmlformats.org/officeDocument/2006/relationships" xmlns:p="http://schemas.openxmlformats.org/presentationml/2006/main">
+  <p:cSld>
+    <p:spTree>
+      <p:nvGrpSpPr>
+        <p:cNvPr id="1" name=""/>
+        <p:cNvGrpSpPr/>
+        <p:nvPr/>
+      </p:nvGrpSpPr>
+      <p:grpSpPr>
+        <a:xfrm>
+          <a:off x="0" y="0"/>
+          <a:ext cx="0" cy="0"/>
+          <a:chOff x="0" y="0"/>
+          <a:chExt cx="0" cy="0"/>
+        </a:xfrm>
+      </p:grpSpPr>
+      <p:sp>
+        <p:nvSpPr>
+          <p:cNvPr id="2" name="TextBox 1"/>
+          <p:cNvSpPr txBox="1"/>
+          <p:nvPr/>
+        </p:nvSpPr>
+        <p:spPr>
+          <a:xfrm>
+            <a:off x="548640" y="365760"/>
+            <a:ext cx="11064240" cy="822960"/>
+          </a:xfrm>
+          <a:prstGeom prst="rect">
+            <a:avLst/>
+          </a:prstGeom>
+          <a:noFill/>
+        </p:spPr>
+        <p:txBody>
+          <a:bodyPr wrap="none">
+            <a:spAutoFit/>
+          </a:bodyPr>
+          <a:lstStyle/>
+          <a:p>
+            <a:r>
+              <a:rPr sz="3000" b="1">
+                <a:solidFill>
+                  <a:srgbClr val="0B5C9E"/>
+                </a:solidFill>
+              </a:rPr>
+              <a:t>Skill: elicit_user_preference</a:t>
+            </a:r>
+          </a:p>
+        </p:txBody>
+      </p:sp>
+      <p:sp>
+        <p:nvSpPr>
+          <p:cNvPr id="3" name="TextBox 2"/>
+          <p:cNvSpPr txBox="1"/>
+          <p:nvPr/>
+        </p:nvSpPr>
+        <p:spPr>
+          <a:xfrm>
+            <a:off x="566928" y="1051560"/>
+            <a:ext cx="11064240" cy="457200"/>
+          </a:xfrm>
+          <a:prstGeom prst="rect">
+            <a:avLst/>
+          </a:prstGeom>
+          <a:noFill/>
+        </p:spPr>
+        <p:txBody>
+          <a:bodyPr wrap="none">
+            <a:spAutoFit/>
+          </a:bodyPr>
+          <a:lstStyle/>
+          <a:p>
+            <a:r>
+              <a:rPr sz="1500" i="1">
+                <a:solidFill>
+                  <a:srgbClr val="606060"/>
+                </a:solidFill>
+              </a:rPr>
+              <a:t>Used only at branch points — a routing question, nothing else</a:t>
+            </a:r>
+          </a:p>
+        </p:txBody>
+      </p:sp>
+      <p:sp>
+        <p:nvSpPr>
+          <p:cNvPr id="4" name="TextBox 3"/>
+          <p:cNvSpPr txBox="1"/>
+          <p:nvPr/>
+        </p:nvSpPr>
+        <p:spPr>
+          <a:xfrm>
+            <a:off x="640080" y="1645920"/>
+            <a:ext cx="10972800" cy="4754880"/>
+          </a:xfrm>
+          <a:prstGeom prst="rect">
+            <a:avLst/>
+          </a:prstGeom>
+          <a:noFill/>
+        </p:spPr>
+        <p:txBody>
+          <a:bodyPr wrap="square">
+            <a:spAutoFit/>
+          </a:bodyPr>
+          <a:lstStyle/>
+          <a:p>
+            <a:pPr>
+              <a:spcAft>
+                <a:spcPts val="700"/>
+              </a:spcAft>
+            </a:pPr>
+            <a:r>
+              <a:rPr sz="1700" b="0">
+                <a:solidFill>
+                  <a:srgbClr val="1A1A1A"/>
+                </a:solidFill>
+              </a:rPr>
+              <a:t>• Obtain the user's preference between the alternative routes available at a decision point</a:t>
+            </a:r>
+          </a:p>
+          <a:p>
+            <a:pPr>
+              <a:spcAft>
+                <a:spcPts val="700"/>
+              </a:spcAft>
+            </a:pPr>
+            <a:r>
+              <a:rPr sz="1700" b="0">
+                <a:solidFill>
+                  <a:srgbClr val="1A1A1A"/>
+                </a:solidFill>
+              </a:rPr>
+              <a:t>• It is a conversation, not a form — explain the alternatives, ask follow-ups where ambiguous, confirm</a:t>
+            </a:r>
+          </a:p>
+          <a:p>
+            <a:pPr>
+              <a:spcAft>
+                <a:spcPts val="700"/>
+              </a:spcAft>
+            </a:pPr>
+            <a:r>
+              <a:rPr sz="1700" b="0">
+                <a:solidFill>
+                  <a:srgbClr val="1A1A1A"/>
+                </a:solidFill>
+              </a:rPr>
+              <a:t>• **Report the preference — never state the routing decision.** CUGA FLO makes the decision.</a:t>
+            </a:r>
+          </a:p>
+          <a:p>
+            <a:pPr lvl="1">
+              <a:spcAft>
+                <a:spcPts val="700"/>
+              </a:spcAft>
+            </a:pPr>
+            <a:r>
+              <a:rPr sz="1500" b="0">
+                <a:solidFill>
+                  <a:srgbClr val="1A1A1A"/>
+                </a:solidFill>
+              </a:rPr>
+              <a:t>– "User prefers 'run function' over another update round."     — yes</a:t>
+            </a:r>
+          </a:p>
+          <a:p>
+            <a:pPr lvl="1">
+              <a:spcAft>
+                <a:spcPts val="700"/>
+              </a:spcAft>
+            </a:pPr>
+            <a:r>
+              <a:rPr sz="1500" b="0">
+                <a:solidFill>
+                  <a:srgbClr val="1A1A1A"/>
+                </a:solidFill>
+              </a:rPr>
+              <a:t>– "Run the function next."                                        — no</a:t>
+            </a:r>
+          </a:p>
+          <a:p>
+            <a:pPr>
+              <a:spcAft>
+                <a:spcPts val="700"/>
+              </a:spcAft>
+            </a:pPr>
+            <a:r>
+              <a:rPr sz="1700" b="0">
+                <a:solidFill>
+                  <a:srgbClr val="1A1A1A"/>
+                </a:solidFill>
+              </a:rPr>
+              <a:t>• Does NOT gather operation parameters — a request for a line item or a row value arrives as fulfill_task</a:t>
+            </a:r>
+          </a:p>
+          <a:p>
+            <a:pPr>
+              <a:spcAft>
+                <a:spcPts val="700"/>
+              </a:spcAft>
+            </a:pPr>
+            <a:r>
+              <a:rPr sz="1700" b="0">
+                <a:solidFill>
+                  <a:srgbClr val="1A1A1A"/>
+                </a:solidFill>
+              </a:rPr>
+              <a:t>• When the user was ambiguous, say so in the text — "best reading is X" beats a confident guess; CUGA FLO can route on that</a:t>
+            </a:r>
+          </a:p>
+        </p:txBody>
+      </p:sp>
+    </p:spTree>
+  </p:cSld>
+  <p:clrMapOvr>
+    <a:masterClrMapping/>
+  </p:clrMapOvr>
+</p:sld>
+</file>
+
+<file path=ppt/slides/slide7.xml><?xml version="1.0" encoding="utf-8"?>
+<p:sld xmlns:a="http://schemas.openxmlformats.org/drawingml/2006/main" xmlns:r="http://schemas.openxmlformats.org/officeDocument/2006/relationships" xmlns:p="http://schemas.openxmlformats.org/presentationml/2006/main">
+  <p:cSld>
+    <p:spTree>
+      <p:nvGrpSpPr>
+        <p:cNvPr id="1" name=""/>
+        <p:cNvGrpSpPr/>
+        <p:nvPr/>
+      </p:nvGrpSpPr>
+      <p:grpSpPr>
+        <a:xfrm>
+          <a:off x="0" y="0"/>
+          <a:ext cx="0" cy="0"/>
+          <a:chOff x="0" y="0"/>
+          <a:chExt cx="0" cy="0"/>
+        </a:xfrm>
+      </p:grpSpPr>
       <p:sp>
         <p:nvSpPr>
           <p:cNvPr id="2" name="TextBox 1"/>
@@ -3563,12 +4578,11 @@
           </a:fontRef>
         </p:style>
         <p:txBody>
-          <a:bodyPr rtlCol="0" anchor="ctr" wrap="square" lIns="182880" rIns="182880" tIns="137160" bIns="137160"/>
-          <a:lstStyle/>
-          <a:p>
-            <a:pPr algn="ctr"/>
-            <a:r>
-              <a:rPr sz="1200">
+          <a:bodyPr wrap="square" lIns="182880" tIns="137160" rIns="182880" bIns="137160" rtlCol="0" anchor="ctr"/>
+          <a:lstStyle/>
+          <a:p>
+            <a:r>
+              <a:rPr sz="1200" dirty="0">
                 <a:solidFill>
                   <a:srgbClr val="1A1A1A"/>
                 </a:solidFill>
@@ -3579,18 +4593,36 @@
           </a:p>
           <a:p>
             <a:r>
-              <a:rPr sz="1200">
-                <a:solidFill>
-                  <a:srgbClr val="1A1A1A"/>
-                </a:solidFill>
-                <a:latin typeface="Courier New"/>
-              </a:rPr>
-              <a:t>  Produce the table for line item $line_item on sheet ALL ACCOUNTS 1H. It should</a:t>
-            </a:r>
-          </a:p>
-          <a:p>
-            <a:r>
-              <a:rPr sz="1200">
+              <a:rPr sz="1200" dirty="0">
+                <a:solidFill>
+                  <a:srgbClr val="1A1A1A"/>
+                </a:solidFill>
+                <a:latin typeface="Courier New"/>
+              </a:rPr>
+              <a:t>  Produce the table for line item $</a:t>
+            </a:r>
+            <a:r>
+              <a:rPr sz="1200" dirty="0" err="1">
+                <a:solidFill>
+                  <a:srgbClr val="1A1A1A"/>
+                </a:solidFill>
+                <a:latin typeface="Courier New"/>
+              </a:rPr>
+              <a:t>line_item</a:t>
+            </a:r>
+            <a:r>
+              <a:rPr sz="1200" dirty="0">
+                <a:solidFill>
+                  <a:srgbClr val="1A1A1A"/>
+                </a:solidFill>
+                <a:latin typeface="Courier New"/>
+              </a:rPr>
+              <a:t> on sheet ALL ACCOUNTS 1H. It should</a:t>
+            </a:r>
+          </a:p>
+          <a:p>
+            <a:r>
+              <a:rPr sz="1200" dirty="0">
                 <a:solidFill>
                   <a:srgbClr val="1A1A1A"/>
                 </a:solidFill>
@@ -3601,7 +4633,7 @@
           </a:p>
           <a:p>
             <a:r>
-              <a:rPr sz="1200">
+              <a:rPr sz="1200" dirty="0">
                 <a:solidFill>
                   <a:srgbClr val="1A1A1A"/>
                 </a:solidFill>
@@ -3611,30 +4643,45 @@
             </a:r>
           </a:p>
           <a:p>
-            <a:r>
-              <a:rPr sz="1200">
-                <a:solidFill>
-                  <a:srgbClr val="1A1A1A"/>
-                </a:solidFill>
-                <a:latin typeface="Courier New"/>
-              </a:rPr>
-              <a:t/>
-            </a:r>
-          </a:p>
-          <a:p>
-            <a:r>
-              <a:rPr sz="1200">
-                <a:solidFill>
-                  <a:srgbClr val="1A1A1A"/>
-                </a:solidFill>
-                <a:latin typeface="Courier New"/>
-              </a:rPr>
-              <a:t>  user escalation: Which line item ($line_item)?</a:t>
-            </a:r>
-          </a:p>
-          <a:p>
-            <a:r>
-              <a:rPr sz="1200">
+            <a:endParaRPr sz="1200" dirty="0">
+              <a:solidFill>
+                <a:srgbClr val="1A1A1A"/>
+              </a:solidFill>
+              <a:latin typeface="Courier New"/>
+            </a:endParaRPr>
+          </a:p>
+          <a:p>
+            <a:r>
+              <a:rPr sz="1200" dirty="0">
+                <a:solidFill>
+                  <a:srgbClr val="1A1A1A"/>
+                </a:solidFill>
+                <a:latin typeface="Courier New"/>
+              </a:rPr>
+              <a:t>  user escalation: Which line item ($</a:t>
+            </a:r>
+            <a:r>
+              <a:rPr sz="1200" dirty="0" err="1">
+                <a:solidFill>
+                  <a:srgbClr val="1A1A1A"/>
+                </a:solidFill>
+                <a:latin typeface="Courier New"/>
+              </a:rPr>
+              <a:t>line_item</a:t>
+            </a:r>
+            <a:r>
+              <a:rPr sz="1200" dirty="0">
+                <a:solidFill>
+                  <a:srgbClr val="1A1A1A"/>
+                </a:solidFill>
+                <a:latin typeface="Courier New"/>
+              </a:rPr>
+              <a:t>)?</a:t>
+            </a:r>
+          </a:p>
+          <a:p>
+            <a:r>
+              <a:rPr sz="1200" dirty="0">
                 <a:solidFill>
                   <a:srgbClr val="1A1A1A"/>
                 </a:solidFill>
@@ -3645,46 +4692,93 @@
           </a:p>
           <a:p>
             <a:r>
-              <a:rPr sz="1200">
-                <a:solidFill>
-                  <a:srgbClr val="1A1A1A"/>
-                </a:solidFill>
-                <a:latin typeface="Courier New"/>
-              </a:rPr>
-              <a:t>  $line_item : The identifier of the table (line item) to retrieve from the sheet.</a:t>
-            </a:r>
-          </a:p>
-          <a:p>
-            <a:r>
-              <a:rPr sz="1200">
-                <a:solidFill>
-                  <a:srgbClr val="1A1A1A"/>
-                </a:solidFill>
-                <a:latin typeface="Courier New"/>
-              </a:rPr>
-              <a:t/>
-            </a:r>
-          </a:p>
-          <a:p>
-            <a:r>
-              <a:rPr sz="1200">
-                <a:solidFill>
-                  <a:srgbClr val="1A1A1A"/>
-                </a:solidFill>
-                <a:latin typeface="Courier New"/>
-              </a:rPr>
-              <a:t>OUT:  (ask the user for $line_item, perform the retrieval, then reply with the outcome)</a:t>
-            </a:r>
-          </a:p>
-          <a:p>
-            <a:r>
-              <a:rPr sz="1200">
-                <a:solidFill>
-                  <a:srgbClr val="1A1A1A"/>
-                </a:solidFill>
-                <a:latin typeface="Courier New"/>
-              </a:rPr>
-              <a:t>  Retrieved line item 'Cloud Platform' from ALL ACCOUNTS 1H - 14 rows.</a:t>
+              <a:rPr sz="1200" dirty="0">
+                <a:solidFill>
+                  <a:srgbClr val="1A1A1A"/>
+                </a:solidFill>
+                <a:latin typeface="Courier New"/>
+              </a:rPr>
+              <a:t>  $</a:t>
+            </a:r>
+            <a:r>
+              <a:rPr sz="1200" dirty="0" err="1">
+                <a:solidFill>
+                  <a:srgbClr val="1A1A1A"/>
+                </a:solidFill>
+                <a:latin typeface="Courier New"/>
+              </a:rPr>
+              <a:t>line_item</a:t>
+            </a:r>
+            <a:r>
+              <a:rPr sz="1200" dirty="0">
+                <a:solidFill>
+                  <a:srgbClr val="1A1A1A"/>
+                </a:solidFill>
+                <a:latin typeface="Courier New"/>
+              </a:rPr>
+              <a:t> : The identifier of the table (line item) to retrieve from the sheet.</a:t>
+            </a:r>
+          </a:p>
+          <a:p>
+            <a:endParaRPr lang="en-US" sz="1200" dirty="0">
+              <a:solidFill>
+                <a:srgbClr val="1A1A1A"/>
+              </a:solidFill>
+              <a:latin typeface="Courier New"/>
+            </a:endParaRPr>
+          </a:p>
+          <a:p>
+            <a:r>
+              <a:rPr lang="en-US" sz="1200" dirty="0">
+                <a:solidFill>
+                  <a:srgbClr val="1A1A1A"/>
+                </a:solidFill>
+                <a:latin typeface="Courier New"/>
+              </a:rPr>
+              <a:t>DO: Ask the user for $</a:t>
+            </a:r>
+            <a:r>
+              <a:rPr lang="en-US" sz="1200" dirty="0" err="1">
+                <a:solidFill>
+                  <a:srgbClr val="1A1A1A"/>
+                </a:solidFill>
+                <a:latin typeface="Courier New"/>
+              </a:rPr>
+              <a:t>line_item</a:t>
+            </a:r>
+            <a:r>
+              <a:rPr lang="en-US" sz="1200" dirty="0">
+                <a:solidFill>
+                  <a:srgbClr val="1A1A1A"/>
+                </a:solidFill>
+                <a:latin typeface="Courier New"/>
+              </a:rPr>
+              <a:t>, perform the retrieval, then reply with the outcome.</a:t>
+            </a:r>
+            <a:endParaRPr lang="en-IL" sz="1200" dirty="0">
+              <a:solidFill>
+                <a:srgbClr val="1A1A1A"/>
+              </a:solidFill>
+              <a:latin typeface="Courier New"/>
+            </a:endParaRPr>
+          </a:p>
+          <a:p>
+            <a:endParaRPr sz="1200" dirty="0">
+              <a:solidFill>
+                <a:srgbClr val="1A1A1A"/>
+              </a:solidFill>
+              <a:latin typeface="Courier New"/>
+            </a:endParaRPr>
+          </a:p>
+          <a:p>
+            <a:r>
+              <a:rPr sz="1200" dirty="0">
+                <a:solidFill>
+                  <a:srgbClr val="1A1A1A"/>
+                </a:solidFill>
+                <a:latin typeface="Courier New"/>
+              </a:rPr>
+              <a:t>OUT: Retrieved line item 'Cloud Platform' from ALL ACCOUNTS 1H - 14 rows.</a:t>
             </a:r>
           </a:p>
         </p:txBody>
@@ -3730,8 +4824,8 @@
 </p:sld>
 </file>
 
-<file path=ppt/slides/slide12.xml><?xml version="1.0" encoding="utf-8"?>
-<p:sld xmlns:a="http://schemas.openxmlformats.org/drawingml/2006/main" xmlns:p="http://schemas.openxmlformats.org/presentationml/2006/main" xmlns:r="http://schemas.openxmlformats.org/officeDocument/2006/relationships">
+<file path=ppt/slides/slide8.xml><?xml version="1.0" encoding="utf-8"?>
+<p:sld xmlns:a="http://schemas.openxmlformats.org/drawingml/2006/main" xmlns:r="http://schemas.openxmlformats.org/officeDocument/2006/relationships" xmlns:p="http://schemas.openxmlformats.org/presentationml/2006/main">
   <p:cSld>
     <p:spTree>
       <p:nvGrpSpPr>
@@ -3739,7 +4833,14 @@
         <p:cNvGrpSpPr/>
         <p:nvPr/>
       </p:nvGrpSpPr>
-      <p:grpSpPr/>
+      <p:grpSpPr>
+        <a:xfrm>
+          <a:off x="0" y="0"/>
+          <a:ext cx="0" cy="0"/>
+          <a:chOff x="0" y="0"/>
+          <a:chExt cx="0" cy="0"/>
+        </a:xfrm>
+      </p:grpSpPr>
       <p:sp>
         <p:nvSpPr>
           <p:cNvPr id="2" name="TextBox 1"/>
@@ -3844,12 +4945,11 @@
           </a:fontRef>
         </p:style>
         <p:txBody>
-          <a:bodyPr rtlCol="0" anchor="ctr" wrap="square" lIns="182880" rIns="182880" tIns="137160" bIns="137160"/>
-          <a:lstStyle/>
-          <a:p>
-            <a:pPr algn="ctr"/>
-            <a:r>
-              <a:rPr sz="1200">
+          <a:bodyPr wrap="square" lIns="182880" tIns="137160" rIns="182880" bIns="137160" rtlCol="0" anchor="ctr"/>
+          <a:lstStyle/>
+          <a:p>
+            <a:r>
+              <a:rPr sz="1200" dirty="0">
                 <a:solidFill>
                   <a:srgbClr val="1A1A1A"/>
                 </a:solidFill>
@@ -3860,7 +4960,7 @@
           </a:p>
           <a:p>
             <a:r>
-              <a:rPr sz="1200">
+              <a:rPr sz="1200" dirty="0">
                 <a:solidFill>
                   <a:srgbClr val="1A1A1A"/>
                 </a:solidFill>
@@ -3870,19 +4970,16 @@
             </a:r>
           </a:p>
           <a:p>
-            <a:r>
-              <a:rPr sz="1200">
-                <a:solidFill>
-                  <a:srgbClr val="1A1A1A"/>
-                </a:solidFill>
-                <a:latin typeface="Courier New"/>
-              </a:rPr>
-              <a:t/>
-            </a:r>
-          </a:p>
-          <a:p>
-            <a:r>
-              <a:rPr sz="1200">
+            <a:endParaRPr sz="1200" dirty="0">
+              <a:solidFill>
+                <a:srgbClr val="1A1A1A"/>
+              </a:solidFill>
+              <a:latin typeface="Courier New"/>
+            </a:endParaRPr>
+          </a:p>
+          <a:p>
+            <a:r>
+              <a:rPr sz="1200" dirty="0">
                 <a:solidFill>
                   <a:srgbClr val="1A1A1A"/>
                 </a:solidFill>
@@ -3893,7 +4990,7 @@
           </a:p>
           <a:p>
             <a:r>
-              <a:rPr sz="1200">
+              <a:rPr sz="1200" dirty="0">
                 <a:solidFill>
                   <a:srgbClr val="1A1A1A"/>
                 </a:solidFill>
@@ -3903,41 +5000,62 @@
             </a:r>
           </a:p>
           <a:p>
-            <a:r>
-              <a:rPr sz="1200">
-                <a:solidFill>
-                  <a:srgbClr val="1A1A1A"/>
-                </a:solidFill>
-                <a:latin typeface="Courier New"/>
-              </a:rPr>
-              <a:t/>
-            </a:r>
-          </a:p>
-          <a:p>
-            <a:r>
-              <a:rPr sz="1200">
-                <a:solidFill>
-                  <a:srgbClr val="1A1A1A"/>
-                </a:solidFill>
-                <a:latin typeface="Courier New"/>
-              </a:rPr>
-              <a:t>CONVERSATION:</a:t>
-            </a:r>
-          </a:p>
-          <a:p>
-            <a:r>
-              <a:rPr sz="1200">
-                <a:solidFill>
-                  <a:srgbClr val="1A1A1A"/>
-                </a:solidFill>
-                <a:latin typeface="Courier New"/>
-              </a:rPr>
-              <a:t>  agent0: The update to 'Cloud Platform' is done. Update another row, or move on to</a:t>
-            </a:r>
-          </a:p>
-          <a:p>
-            <a:r>
-              <a:rPr sz="1200">
+            <a:endParaRPr sz="1200" dirty="0">
+              <a:solidFill>
+                <a:srgbClr val="1A1A1A"/>
+              </a:solidFill>
+              <a:latin typeface="Courier New"/>
+            </a:endParaRPr>
+          </a:p>
+          <a:p>
+            <a:r>
+              <a:rPr lang="en-US" sz="1200" dirty="0">
+                <a:solidFill>
+                  <a:srgbClr val="1A1A1A"/>
+                </a:solidFill>
+                <a:latin typeface="Courier New"/>
+              </a:rPr>
+              <a:t>DO: (</a:t>
+            </a:r>
+            <a:r>
+              <a:rPr sz="1200" dirty="0">
+                <a:solidFill>
+                  <a:srgbClr val="1A1A1A"/>
+                </a:solidFill>
+                <a:latin typeface="Courier New"/>
+              </a:rPr>
+              <a:t>CONVERSATION</a:t>
+            </a:r>
+            <a:r>
+              <a:rPr lang="en-US" sz="1200" dirty="0">
+                <a:solidFill>
+                  <a:srgbClr val="1A1A1A"/>
+                </a:solidFill>
+                <a:latin typeface="Courier New"/>
+              </a:rPr>
+              <a:t>)</a:t>
+            </a:r>
+            <a:endParaRPr sz="1200" dirty="0">
+              <a:solidFill>
+                <a:srgbClr val="1A1A1A"/>
+              </a:solidFill>
+              <a:latin typeface="Courier New"/>
+            </a:endParaRPr>
+          </a:p>
+          <a:p>
+            <a:r>
+              <a:rPr sz="1200" dirty="0">
+                <a:solidFill>
+                  <a:srgbClr val="1A1A1A"/>
+                </a:solidFill>
+                <a:latin typeface="Courier New"/>
+              </a:rPr>
+              <a:t>  agent0: Update another row, or move on to</a:t>
+            </a:r>
+          </a:p>
+          <a:p>
+            <a:r>
+              <a:rPr sz="1200" dirty="0">
                 <a:solidFill>
                   <a:srgbClr val="1A1A1A"/>
                 </a:solidFill>
@@ -3948,7 +5066,7 @@
           </a:p>
           <a:p>
             <a:r>
-              <a:rPr sz="1200">
+              <a:rPr sz="1200" dirty="0">
                 <a:solidFill>
                   <a:srgbClr val="1A1A1A"/>
                 </a:solidFill>
@@ -3959,7 +5077,7 @@
           </a:p>
           <a:p>
             <a:r>
-              <a:rPr sz="1200">
+              <a:rPr sz="1200" dirty="0">
                 <a:solidFill>
                   <a:srgbClr val="1A1A1A"/>
                 </a:solidFill>
@@ -3970,7 +5088,7 @@
           </a:p>
           <a:p>
             <a:r>
-              <a:rPr sz="1200">
+              <a:rPr sz="1200" dirty="0">
                 <a:solidFill>
                   <a:srgbClr val="1A1A1A"/>
                 </a:solidFill>
@@ -3980,19 +5098,16 @@
             </a:r>
           </a:p>
           <a:p>
-            <a:r>
-              <a:rPr sz="1200">
-                <a:solidFill>
-                  <a:srgbClr val="1A1A1A"/>
-                </a:solidFill>
-                <a:latin typeface="Courier New"/>
-              </a:rPr>
-              <a:t/>
-            </a:r>
-          </a:p>
-          <a:p>
-            <a:r>
-              <a:rPr sz="1200">
+            <a:endParaRPr sz="1200" dirty="0">
+              <a:solidFill>
+                <a:srgbClr val="1A1A1A"/>
+              </a:solidFill>
+              <a:latin typeface="Courier New"/>
+            </a:endParaRPr>
+          </a:p>
+          <a:p>
+            <a:r>
+              <a:rPr sz="1200" dirty="0">
                 <a:solidFill>
                   <a:srgbClr val="1A1A1A"/>
                 </a:solidFill>
@@ -4003,7 +5118,7 @@
           </a:p>
           <a:p>
             <a:r>
-              <a:rPr sz="1200">
+              <a:rPr sz="1200" dirty="0">
                 <a:solidFill>
                   <a:srgbClr val="1A1A1A"/>
                 </a:solidFill>
@@ -4022,8 +5137,8 @@
 </p:sld>
 </file>
 
-<file path=ppt/slides/slide13.xml><?xml version="1.0" encoding="utf-8"?>
-<p:sld xmlns:a="http://schemas.openxmlformats.org/drawingml/2006/main" xmlns:p="http://schemas.openxmlformats.org/presentationml/2006/main" xmlns:r="http://schemas.openxmlformats.org/officeDocument/2006/relationships">
+<file path=ppt/slides/slide9.xml><?xml version="1.0" encoding="utf-8"?>
+<p:sld xmlns:a="http://schemas.openxmlformats.org/drawingml/2006/main" xmlns:r="http://schemas.openxmlformats.org/officeDocument/2006/relationships" xmlns:p="http://schemas.openxmlformats.org/presentationml/2006/main">
   <p:cSld>
     <p:spTree>
       <p:nvGrpSpPr>
@@ -4031,7 +5146,14 @@
         <p:cNvGrpSpPr/>
         <p:nvPr/>
       </p:nvGrpSpPr>
-      <p:grpSpPr/>
+      <p:grpSpPr>
+        <a:xfrm>
+          <a:off x="0" y="0"/>
+          <a:ext cx="0" cy="0"/>
+          <a:chOff x="0" y="0"/>
+          <a:chExt cx="0" cy="0"/>
+        </a:xfrm>
+      </p:grpSpPr>
       <p:sp>
         <p:nvSpPr>
           <p:cNvPr id="2" name="TextBox 1"/>
@@ -4107,7 +5229,7 @@
         <p:spPr>
           <a:xfrm>
             <a:off x="640080" y="1645920"/>
-            <a:ext cx="10972800" cy="4754880"/>
+            <a:ext cx="10972800" cy="1056700"/>
           </a:xfrm>
           <a:prstGeom prst="rect">
             <a:avLst/>
@@ -4126,12 +5248,12 @@
               </a:spcAft>
             </a:pPr>
             <a:r>
-              <a:rPr sz="1700" b="0">
-                <a:solidFill>
-                  <a:srgbClr val="1A1A1A"/>
-                </a:solidFill>
-              </a:rPr>
-              <a:t>• **Report, don't rule** — on a routing consultation, report the preference; never state the decision. The single thing most likely to be got wrong.</a:t>
+              <a:rPr sz="1700" b="0" dirty="0">
+                <a:solidFill>
+                  <a:srgbClr val="1A1A1A"/>
+                </a:solidFill>
+              </a:rPr>
+              <a:t>• **Report the outcome, not the payload** — one clear sentence beats a table</a:t>
             </a:r>
           </a:p>
           <a:p>
@@ -4141,12 +5263,12 @@
               </a:spcAft>
             </a:pPr>
             <a:r>
-              <a:rPr sz="1700" b="0">
-                <a:solidFill>
-                  <a:srgbClr val="1A1A1A"/>
-                </a:solidFill>
-              </a:rPr>
-              <a:t>• **Never invent parameters — ask, or fail** — escalation block -&gt; ask the user; no block -&gt; fail with what was missing. Guessing writes wrong data into real spreadsheets.</a:t>
+              <a:rPr sz="1700" b="0" dirty="0">
+                <a:solidFill>
+                  <a:srgbClr val="1A1A1A"/>
+                </a:solidFill>
+              </a:rPr>
+              <a:t>• **Fail loudly and specifically** — "Sheet ALL ACCOUNTS 1H not found" is actionable; "Operation failed" is not</a:t>
             </a:r>
           </a:p>
           <a:p>
@@ -4156,2452 +5278,12 @@
               </a:spcAft>
             </a:pPr>
             <a:r>
-              <a:rPr sz="1700" b="0">
-                <a:solidFill>
-                  <a:srgbClr val="1A1A1A"/>
-                </a:solidFill>
-              </a:rPr>
-              <a:t>• **Report the outcome, not the payload** — one clear sentence beats a table</a:t>
-            </a:r>
-          </a:p>
-          <a:p>
-            <a:pPr>
-              <a:spcAft>
-                <a:spcPts val="700"/>
-              </a:spcAft>
-            </a:pPr>
-            <a:r>
-              <a:rPr sz="1700" b="0">
-                <a:solidFill>
-                  <a:srgbClr val="1A1A1A"/>
-                </a:solidFill>
-              </a:rPr>
-              <a:t>• **Never dismiss a dialog silently** — answer as instructed where $dialog_chosen is supplied; always report which dialogs appeared and how they were answered</a:t>
-            </a:r>
-          </a:p>
-          <a:p>
-            <a:pPr>
-              <a:spcAft>
-                <a:spcPts val="700"/>
-              </a:spcAft>
-            </a:pPr>
-            <a:r>
-              <a:rPr sz="1700" b="0">
-                <a:solidFill>
-                  <a:srgbClr val="1A1A1A"/>
-                </a:solidFill>
-              </a:rPr>
-              <a:t>• **Fail loudly and specifically** — "Sheet ALL ACCOUNTS 1H not found" is actionable; "Operation failed" is not</a:t>
-            </a:r>
-          </a:p>
-          <a:p>
-            <a:pPr>
-              <a:spcAft>
-                <a:spcPts val="700"/>
-              </a:spcAft>
-            </a:pPr>
-            <a:r>
-              <a:rPr sz="1700" b="0">
+              <a:rPr sz="1700" b="0" dirty="0">
                 <a:solidFill>
                   <a:srgbClr val="1A1A1A"/>
                 </a:solidFill>
               </a:rPr>
               <a:t>• **Responses are plain text** — CUGA FLO's client discards response metadata; nothing you put there is read</a:t>
-            </a:r>
-          </a:p>
-        </p:txBody>
-      </p:sp>
-    </p:spTree>
-  </p:cSld>
-  <p:clrMapOvr>
-    <a:masterClrMapping/>
-  </p:clrMapOvr>
-</p:sld>
-</file>
-
-<file path=ppt/slides/slide14.xml><?xml version="1.0" encoding="utf-8"?>
-<p:sld xmlns:a="http://schemas.openxmlformats.org/drawingml/2006/main" xmlns:p="http://schemas.openxmlformats.org/presentationml/2006/main" xmlns:r="http://schemas.openxmlformats.org/officeDocument/2006/relationships">
-  <p:cSld>
-    <p:spTree>
-      <p:nvGrpSpPr>
-        <p:cNvPr id="1" name=""/>
-        <p:cNvGrpSpPr/>
-        <p:nvPr/>
-      </p:nvGrpSpPr>
-      <p:grpSpPr/>
-      <p:sp>
-        <p:nvSpPr>
-          <p:cNvPr id="2" name="TextBox 1"/>
-          <p:cNvSpPr txBox="1"/>
-          <p:nvPr/>
-        </p:nvSpPr>
-        <p:spPr>
-          <a:xfrm>
-            <a:off x="548640" y="365760"/>
-            <a:ext cx="11064240" cy="822960"/>
-          </a:xfrm>
-          <a:prstGeom prst="rect">
-            <a:avLst/>
-          </a:prstGeom>
-          <a:noFill/>
-        </p:spPr>
-        <p:txBody>
-          <a:bodyPr wrap="none">
-            <a:spAutoFit/>
-          </a:bodyPr>
-          <a:lstStyle/>
-          <a:p>
-            <a:r>
-              <a:rPr sz="3000" b="1">
-                <a:solidFill>
-                  <a:srgbClr val="0B5C9E"/>
-                </a:solidFill>
-              </a:rPr>
-              <a:t>Timeouts and state</a:t>
-            </a:r>
-          </a:p>
-        </p:txBody>
-      </p:sp>
-      <p:sp>
-        <p:nvSpPr>
-          <p:cNvPr id="3" name="TextBox 2"/>
-          <p:cNvSpPr txBox="1"/>
-          <p:nvPr/>
-        </p:nvSpPr>
-        <p:spPr>
-          <a:xfrm>
-            <a:off x="640080" y="1645920"/>
-            <a:ext cx="10972800" cy="4754880"/>
-          </a:xfrm>
-          <a:prstGeom prst="rect">
-            <a:avLst/>
-          </a:prstGeom>
-          <a:noFill/>
-        </p:spPr>
-        <p:txBody>
-          <a:bodyPr wrap="square">
-            <a:spAutoFit/>
-          </a:bodyPr>
-          <a:lstStyle/>
-          <a:p>
-            <a:pPr>
-              <a:spcAft>
-                <a:spcPts val="700"/>
-              </a:spcAft>
-            </a:pPr>
-            <a:r>
-              <a:rPr sz="1700" b="0">
-                <a:solidFill>
-                  <a:srgbClr val="1A1A1A"/>
-                </a:solidFill>
-              </a:rPr>
-              <a:t>• **120-second ceiling** — a delegated task or a consultation runs inside a blocking control point under a 120s hop</a:t>
-            </a:r>
-          </a:p>
-          <a:p>
-            <a:pPr lvl="1">
-              <a:spcAft>
-                <a:spcPts val="700"/>
-              </a:spcAft>
-            </a:pPr>
-            <a:r>
-              <a:rPr sz="1500" b="0">
-                <a:solidFill>
-                  <a:srgbClr val="1A1A1A"/>
-                </a:solidFill>
-              </a:rPr>
-              <a:t>– Interviews must complete, end to end, inside 120 seconds — exceeding it fails the process instance, no park-and-resume</a:t>
-            </a:r>
-          </a:p>
-          <a:p>
-            <a:pPr lvl="1">
-              <a:spcAft>
-                <a:spcPts val="700"/>
-              </a:spcAft>
-            </a:pPr>
-            <a:r>
-              <a:rPr sz="1500" b="0">
-                <a:solidFill>
-                  <a:srgbClr val="1A1A1A"/>
-                </a:solidFill>
-              </a:rPr>
-              <a:t>– Only fast, non-interactive turns fit in-line today; a modelled BPMN user task for long waits is a later follow-on</a:t>
-            </a:r>
-          </a:p>
-          <a:p>
-            <a:pPr>
-              <a:spcAft>
-                <a:spcPts val="700"/>
-              </a:spcAft>
-            </a:pPr>
-            <a:r>
-              <a:rPr sz="1700" b="0">
-                <a:solidFill>
-                  <a:srgbClr val="1A1A1A"/>
-                </a:solidFill>
-              </a:rPr>
-              <a:t>• **No correlation identifier is sent** — each request is an independent A2A message with a fresh message_id; context_id / task_id unset; metadata carries only role</a:t>
-            </a:r>
-          </a:p>
-          <a:p>
-            <a:pPr lvl="1">
-              <a:spcAft>
-                <a:spcPts val="700"/>
-              </a:spcAft>
-            </a:pPr>
-            <a:r>
-              <a:rPr sz="1500" b="0">
-                <a:solidFill>
-                  <a:srgbClr val="1A1A1A"/>
-                </a:solidFill>
-              </a:rPr>
-              <a:t>– Stateless (ask for every named parameter every time) is always correct and a fine first implementation</a:t>
-            </a:r>
-          </a:p>
-          <a:p>
-            <a:pPr lvl="1">
-              <a:spcAft>
-                <a:spcPts val="700"/>
-              </a:spcAft>
-            </a:pPr>
-            <a:r>
-              <a:rPr sz="1500" b="0">
-                <a:solidFill>
-                  <a:srgbClr val="1A1A1A"/>
-                </a:solidFill>
-              </a:rPr>
-              <a:t>– Stateful is your choice — but key memory on your own user session, confirm reused values, never carry a value across a repeat</a:t>
-            </a:r>
-          </a:p>
-          <a:p>
-            <a:pPr lvl="1">
-              <a:spcAft>
-                <a:spcPts val="700"/>
-              </a:spcAft>
-            </a:pPr>
-            <a:r>
-              <a:rPr sz="1500" b="0">
-                <a:solidFill>
-                  <a:srgbClr val="1A1A1A"/>
-                </a:solidFill>
-              </a:rPr>
-              <a:t>– If the missing correlation id is the blocker, tell us — sending a stable identifier is a small change on our side</a:t>
-            </a:r>
-          </a:p>
-        </p:txBody>
-      </p:sp>
-    </p:spTree>
-  </p:cSld>
-  <p:clrMapOvr>
-    <a:masterClrMapping/>
-  </p:clrMapOvr>
-</p:sld>
-</file>
-
-<file path=ppt/slides/slide15.xml><?xml version="1.0" encoding="utf-8"?>
-<p:sld xmlns:a="http://schemas.openxmlformats.org/drawingml/2006/main" xmlns:p="http://schemas.openxmlformats.org/presentationml/2006/main" xmlns:r="http://schemas.openxmlformats.org/officeDocument/2006/relationships">
-  <p:cSld>
-    <p:spTree>
-      <p:nvGrpSpPr>
-        <p:cNvPr id="1" name=""/>
-        <p:cNvGrpSpPr/>
-        <p:nvPr/>
-      </p:nvGrpSpPr>
-      <p:grpSpPr/>
-      <p:sp>
-        <p:nvSpPr>
-          <p:cNvPr id="2" name="TextBox 1"/>
-          <p:cNvSpPr txBox="1"/>
-          <p:nvPr/>
-        </p:nvSpPr>
-        <p:spPr>
-          <a:xfrm>
-            <a:off x="548640" y="365760"/>
-            <a:ext cx="11064240" cy="822960"/>
-          </a:xfrm>
-          <a:prstGeom prst="rect">
-            <a:avLst/>
-          </a:prstGeom>
-          <a:noFill/>
-        </p:spPr>
-        <p:txBody>
-          <a:bodyPr wrap="none">
-            <a:spAutoFit/>
-          </a:bodyPr>
-          <a:lstStyle/>
-          <a:p>
-            <a:r>
-              <a:rPr sz="3000" b="1">
-                <a:solidFill>
-                  <a:srgbClr val="0B5C9E"/>
-                </a:solidFill>
-              </a:rPr>
-              <a:t>Build checklist</a:t>
-            </a:r>
-          </a:p>
-        </p:txBody>
-      </p:sp>
-      <p:sp>
-        <p:nvSpPr>
-          <p:cNvPr id="3" name="TextBox 2"/>
-          <p:cNvSpPr txBox="1"/>
-          <p:nvPr/>
-        </p:nvSpPr>
-        <p:spPr>
-          <a:xfrm>
-            <a:off x="640080" y="1645920"/>
-            <a:ext cx="10972800" cy="4754880"/>
-          </a:xfrm>
-          <a:prstGeom prst="rect">
-            <a:avLst/>
-          </a:prstGeom>
-          <a:noFill/>
-        </p:spPr>
-        <p:txBody>
-          <a:bodyPr wrap="square">
-            <a:spAutoFit/>
-          </a:bodyPr>
-          <a:lstStyle/>
-          <a:p>
-            <a:pPr>
-              <a:spcAft>
-                <a:spcPts val="700"/>
-              </a:spcAft>
-            </a:pPr>
-            <a:r>
-              <a:rPr sz="1500" b="0">
-                <a:solidFill>
-                  <a:srgbClr val="1A1A1A"/>
-                </a:solidFill>
-              </a:rPr>
-              <a:t>• GET /.well-known/agent-card.json returns the card</a:t>
-            </a:r>
-          </a:p>
-          <a:p>
-            <a:pPr>
-              <a:spcAft>
-                <a:spcPts val="700"/>
-              </a:spcAft>
-            </a:pPr>
-            <a:r>
-              <a:rPr sz="1500" b="0">
-                <a:solidFill>
-                  <a:srgbClr val="1A1A1A"/>
-                </a:solidFill>
-              </a:rPr>
-              <a:t>• message/send accepts a text Message and returns a plain text Message</a:t>
-            </a:r>
-          </a:p>
-          <a:p>
-            <a:pPr>
-              <a:spcAft>
-                <a:spcPts val="700"/>
-              </a:spcAft>
-            </a:pPr>
-            <a:r>
-              <a:rPr sz="1500" b="0">
-                <a:solidFill>
-                  <a:srgbClr val="1A1A1A"/>
-                </a:solidFill>
-              </a:rPr>
-              <a:t>• Both capabilities served by ONE AgentExecutor.execute() — no second service, no per-skill endpoint</a:t>
-            </a:r>
-          </a:p>
-          <a:p>
-            <a:pPr>
-              <a:spcAft>
-                <a:spcPts val="700"/>
-              </a:spcAft>
-            </a:pPr>
-            <a:r>
-              <a:rPr sz="1500" b="0">
-                <a:solidFill>
-                  <a:srgbClr val="1A1A1A"/>
-                </a:solidFill>
-              </a:rPr>
-              <a:t>• role read from MessageSendParams.metadata (not Message.role) and dispatched; missing / unrecognised role fails loudly</a:t>
-            </a:r>
-          </a:p>
-          <a:p>
-            <a:pPr>
-              <a:spcAft>
-                <a:spcPts val="700"/>
-              </a:spcAft>
-            </a:pPr>
-            <a:r>
-              <a:rPr sz="1500" b="0">
-                <a:solidFill>
-                  <a:srgbClr val="1A1A1A"/>
-                </a:solidFill>
-              </a:rPr>
-              <a:t>• fulfill_task dispatches all three operation types from the statement alone; an ambiguous type fails explicitly</a:t>
-            </a:r>
-          </a:p>
-          <a:p>
-            <a:pPr>
-              <a:spcAft>
-                <a:spcPts val="700"/>
-              </a:spcAft>
-            </a:pPr>
-            <a:r>
-              <a:rPr sz="1500" b="0">
-                <a:solidFill>
-                  <a:srgbClr val="1A1A1A"/>
-                </a:solidFill>
-              </a:rPr>
-              <a:t>• A 'user escalation:' block triggers asking the user; a missing parameter with no block fails, never a guess</a:t>
-            </a:r>
-          </a:p>
-          <a:p>
-            <a:pPr>
-              <a:spcAft>
-                <a:spcPts val="700"/>
-              </a:spcAft>
-            </a:pPr>
-            <a:r>
-              <a:rPr sz="1500" b="0">
-                <a:solidFill>
-                  <a:srgbClr val="1A1A1A"/>
-                </a:solidFill>
-              </a:rPr>
-              <a:t>• Update dialogs are answered and reported, never silently dismissed</a:t>
-            </a:r>
-          </a:p>
-          <a:p>
-            <a:pPr>
-              <a:spcAft>
-                <a:spcPts val="700"/>
-              </a:spcAft>
-            </a:pPr>
-            <a:r>
-              <a:rPr sz="1500" b="0">
-                <a:solidFill>
-                  <a:srgbClr val="1A1A1A"/>
-                </a:solidFill>
-              </a:rPr>
-              <a:t>• Consultation replies report preferences, never decisions; fulfilment replies state the outcome in one line</a:t>
-            </a:r>
-          </a:p>
-          <a:p>
-            <a:pPr>
-              <a:spcAft>
-                <a:spcPts val="700"/>
-              </a:spcAft>
-            </a:pPr>
-            <a:r>
-              <a:rPr sz="1500" b="0">
-                <a:solidFill>
-                  <a:srgbClr val="1A1A1A"/>
-                </a:solidFill>
-              </a:rPr>
-              <a:t>• Every interview and every spreadsheet operation completes well inside 120 seconds</a:t>
-            </a:r>
-          </a:p>
-        </p:txBody>
-      </p:sp>
-    </p:spTree>
-  </p:cSld>
-  <p:clrMapOvr>
-    <a:masterClrMapping/>
-  </p:clrMapOvr>
-</p:sld>
-</file>
-
-<file path=ppt/slides/slide2.xml><?xml version="1.0" encoding="utf-8"?>
-<p:sld xmlns:a="http://schemas.openxmlformats.org/drawingml/2006/main" xmlns:p="http://schemas.openxmlformats.org/presentationml/2006/main" xmlns:r="http://schemas.openxmlformats.org/officeDocument/2006/relationships">
-  <p:cSld>
-    <p:spTree>
-      <p:nvGrpSpPr>
-        <p:cNvPr id="1" name=""/>
-        <p:cNvGrpSpPr/>
-        <p:nvPr/>
-      </p:nvGrpSpPr>
-      <p:grpSpPr/>
-      <p:sp>
-        <p:nvSpPr>
-          <p:cNvPr id="2" name="TextBox 1"/>
-          <p:cNvSpPr txBox="1"/>
-          <p:nvPr/>
-        </p:nvSpPr>
-        <p:spPr>
-          <a:xfrm>
-            <a:off x="548640" y="365760"/>
-            <a:ext cx="11064240" cy="822960"/>
-          </a:xfrm>
-          <a:prstGeom prst="rect">
-            <a:avLst/>
-          </a:prstGeom>
-          <a:noFill/>
-        </p:spPr>
-        <p:txBody>
-          <a:bodyPr wrap="none">
-            <a:spAutoFit/>
-          </a:bodyPr>
-          <a:lstStyle/>
-          <a:p>
-            <a:r>
-              <a:rPr sz="3000" b="1">
-                <a:solidFill>
-                  <a:srgbClr val="0B5C9E"/>
-                </a:solidFill>
-              </a:rPr>
-              <a:t>What CUGA FLO added</a:t>
-            </a:r>
-          </a:p>
-        </p:txBody>
-      </p:sp>
-      <p:sp>
-        <p:nvSpPr>
-          <p:cNvPr id="3" name="TextBox 2"/>
-          <p:cNvSpPr txBox="1"/>
-          <p:nvPr/>
-        </p:nvSpPr>
-        <p:spPr>
-          <a:xfrm>
-            <a:off x="566928" y="1051560"/>
-            <a:ext cx="11064240" cy="457200"/>
-          </a:xfrm>
-          <a:prstGeom prst="rect">
-            <a:avLst/>
-          </a:prstGeom>
-          <a:noFill/>
-        </p:spPr>
-        <p:txBody>
-          <a:bodyPr wrap="none">
-            <a:spAutoFit/>
-          </a:bodyPr>
-          <a:lstStyle/>
-          <a:p>
-            <a:r>
-              <a:rPr sz="1500" i="1">
-                <a:solidFill>
-                  <a:srgbClr val="606060"/>
-                </a:solidFill>
-              </a:rPr>
-              <a:t>A generalised binding to any remote agent reachable over A2A, named in the app YAML</a:t>
-            </a:r>
-          </a:p>
-        </p:txBody>
-      </p:sp>
-      <p:sp>
-        <p:nvSpPr>
-          <p:cNvPr id="4" name="TextBox 3"/>
-          <p:cNvSpPr txBox="1"/>
-          <p:nvPr/>
-        </p:nvSpPr>
-        <p:spPr>
-          <a:xfrm>
-            <a:off x="640080" y="1645920"/>
-            <a:ext cx="10972800" cy="4754880"/>
-          </a:xfrm>
-          <a:prstGeom prst="rect">
-            <a:avLst/>
-          </a:prstGeom>
-          <a:noFill/>
-        </p:spPr>
-        <p:txBody>
-          <a:bodyPr wrap="square">
-            <a:spAutoFit/>
-          </a:bodyPr>
-          <a:lstStyle/>
-          <a:p>
-            <a:pPr>
-              <a:spcAft>
-                <a:spcPts val="700"/>
-              </a:spcAft>
-            </a:pPr>
-            <a:r>
-              <a:rPr sz="1700" b="1">
-                <a:solidFill>
-                  <a:srgbClr val="1A1A1A"/>
-                </a:solidFill>
-              </a:rPr>
-              <a:t>• CUGA FLO drives a BPMN workflow. Two needs could not be served by a local agent:</a:t>
-            </a:r>
-          </a:p>
-          <a:p>
-            <a:pPr lvl="1">
-              <a:spcAft>
-                <a:spcPts val="700"/>
-              </a:spcAft>
-            </a:pPr>
-            <a:r>
-              <a:rPr sz="1500" b="0">
-                <a:solidFill>
-                  <a:srgbClr val="1A1A1A"/>
-                </a:solidFill>
-              </a:rPr>
-              <a:t>– Task fulfilment by a remote agent — a step's work belongs to an external agent, not a local one</a:t>
-            </a:r>
-          </a:p>
-          <a:p>
-            <a:pPr lvl="1">
-              <a:spcAft>
-                <a:spcPts val="700"/>
-              </a:spcAft>
-            </a:pPr>
-            <a:r>
-              <a:rPr sz="1500" b="0">
-                <a:solidFill>
-                  <a:srgbClr val="1A1A1A"/>
-                </a:solidFill>
-              </a:rPr>
-              <a:t>– Human-in-the-loop consultation — a routing branch or a hook needs a preference only a person can give</a:t>
-            </a:r>
-          </a:p>
-          <a:p>
-            <a:pPr>
-              <a:spcAft>
-                <a:spcPts val="700"/>
-              </a:spcAft>
-            </a:pPr>
-            <a:r>
-              <a:rPr sz="1700" b="1">
-                <a:solidFill>
-                  <a:srgbClr val="1A1A1A"/>
-                </a:solidFill>
-              </a:rPr>
-              <a:t>• The asymmetry is the design — authority moves in one case, stays put in the other:</a:t>
-            </a:r>
-          </a:p>
-          <a:p>
-            <a:pPr lvl="1">
-              <a:spcAft>
-                <a:spcPts val="700"/>
-              </a:spcAft>
-            </a:pPr>
-            <a:r>
-              <a:rPr sz="1500" b="0">
-                <a:solidFill>
-                  <a:srgbClr val="1A1A1A"/>
-                </a:solidFill>
-              </a:rPr>
-              <a:t>– Fulfilment — the step is delegated to the remote agent; it becomes the authority for that work</a:t>
-            </a:r>
-          </a:p>
-          <a:p>
-            <a:pPr lvl="1">
-              <a:spcAft>
-                <a:spcPts val="700"/>
-              </a:spcAft>
-            </a:pPr>
-            <a:r>
-              <a:rPr sz="1500" b="0">
-                <a:solidFill>
-                  <a:srgbClr val="1A1A1A"/>
-                </a:solidFill>
-              </a:rPr>
-              <a:t>– Consultation — the remote agent is bound as a tool; CUGA FLO keeps routing / hook authority and concludes itself</a:t>
-            </a:r>
-          </a:p>
-          <a:p>
-            <a:pPr>
-              <a:spcAft>
-                <a:spcPts val="700"/>
-              </a:spcAft>
-            </a:pPr>
-            <a:r>
-              <a:rPr sz="1700" b="1">
-                <a:solidFill>
-                  <a:srgbClr val="1A1A1A"/>
-                </a:solidFill>
-              </a:rPr>
-              <a:t>• Either way the reply needs no CUGA FLO structure — it is the task's result, or input to a local decision</a:t>
-            </a:r>
-          </a:p>
-          <a:p>
-            <a:pPr>
-              <a:spcAft>
-                <a:spcPts val="700"/>
-              </a:spcAft>
-            </a:pPr>
-            <a:r>
-              <a:rPr sz="1700" b="0">
-                <a:solidFill>
-                  <a:srgbClr val="1A1A1A"/>
-                </a:solidFill>
-              </a:rPr>
-              <a:t>• Not hard-coded to "agent 0": any remote agent, listed under a new remote_agents: block in the YAML</a:t>
-            </a:r>
-          </a:p>
-        </p:txBody>
-      </p:sp>
-    </p:spTree>
-  </p:cSld>
-  <p:clrMapOvr>
-    <a:masterClrMapping/>
-  </p:clrMapOvr>
-</p:sld>
-</file>
-
-<file path=ppt/slides/slide3.xml><?xml version="1.0" encoding="utf-8"?>
-<p:sld xmlns:a="http://schemas.openxmlformats.org/drawingml/2006/main" xmlns:p="http://schemas.openxmlformats.org/presentationml/2006/main" xmlns:r="http://schemas.openxmlformats.org/officeDocument/2006/relationships">
-  <p:cSld>
-    <p:spTree>
-      <p:nvGrpSpPr>
-        <p:cNvPr id="1" name=""/>
-        <p:cNvGrpSpPr/>
-        <p:nvPr/>
-      </p:nvGrpSpPr>
-      <p:grpSpPr/>
-      <p:sp>
-        <p:nvSpPr>
-          <p:cNvPr id="2" name="TextBox 1"/>
-          <p:cNvSpPr txBox="1"/>
-          <p:nvPr/>
-        </p:nvSpPr>
-        <p:spPr>
-          <a:xfrm>
-            <a:off x="548640" y="365760"/>
-            <a:ext cx="11064240" cy="822960"/>
-          </a:xfrm>
-          <a:prstGeom prst="rect">
-            <a:avLst/>
-          </a:prstGeom>
-          <a:noFill/>
-        </p:spPr>
-        <p:txBody>
-          <a:bodyPr wrap="none">
-            <a:spAutoFit/>
-          </a:bodyPr>
-          <a:lstStyle/>
-          <a:p>
-            <a:r>
-              <a:rPr sz="3000" b="1">
-                <a:solidFill>
-                  <a:srgbClr val="0B5C9E"/>
-                </a:solidFill>
-              </a:rPr>
-              <a:t>What you are building</a:t>
-            </a:r>
-          </a:p>
-        </p:txBody>
-      </p:sp>
-      <p:sp>
-        <p:nvSpPr>
-          <p:cNvPr id="3" name="TextBox 2"/>
-          <p:cNvSpPr txBox="1"/>
-          <p:nvPr/>
-        </p:nvSpPr>
-        <p:spPr>
-          <a:xfrm>
-            <a:off x="566928" y="1051560"/>
-            <a:ext cx="11064240" cy="457200"/>
-          </a:xfrm>
-          <a:prstGeom prst="rect">
-            <a:avLst/>
-          </a:prstGeom>
-          <a:noFill/>
-        </p:spPr>
-        <p:txBody>
-          <a:bodyPr wrap="none">
-            <a:spAutoFit/>
-          </a:bodyPr>
-          <a:lstStyle/>
-          <a:p>
-            <a:r>
-              <a:rPr sz="1500" i="1">
-                <a:solidFill>
-                  <a:srgbClr val="606060"/>
-                </a:solidFill>
-              </a:rPr>
-              <a:t>One A2A server. CUGA FLO is the client.</a:t>
-            </a:r>
-          </a:p>
-        </p:txBody>
-      </p:sp>
-      <p:sp>
-        <p:nvSpPr>
-          <p:cNvPr id="4" name="TextBox 3"/>
-          <p:cNvSpPr txBox="1"/>
-          <p:nvPr/>
-        </p:nvSpPr>
-        <p:spPr>
-          <a:xfrm>
-            <a:off x="640080" y="1645920"/>
-            <a:ext cx="10972800" cy="4754880"/>
-          </a:xfrm>
-          <a:prstGeom prst="rect">
-            <a:avLst/>
-          </a:prstGeom>
-          <a:noFill/>
-        </p:spPr>
-        <p:txBody>
-          <a:bodyPr wrap="square">
-            <a:spAutoFit/>
-          </a:bodyPr>
-          <a:lstStyle/>
-          <a:p>
-            <a:pPr>
-              <a:spcAft>
-                <a:spcPts val="700"/>
-              </a:spcAft>
-            </a:pPr>
-            <a:r>
-              <a:rPr sz="1700" b="1">
-                <a:solidFill>
-                  <a:srgbClr val="1A1A1A"/>
-                </a:solidFill>
-              </a:rPr>
-              <a:t>• One endpoint, one agent card — reached for two purposes:</a:t>
-            </a:r>
-          </a:p>
-          <a:p>
-            <a:pPr lvl="1">
-              <a:spcAft>
-                <a:spcPts val="700"/>
-              </a:spcAft>
-            </a:pPr>
-            <a:r>
-              <a:rPr sz="1500" b="0">
-                <a:solidFill>
-                  <a:srgbClr val="1A1A1A"/>
-                </a:solidFill>
-              </a:rPr>
-              <a:t>– The Excel capability in the business process — when a step needs a spreadsheet touched, the whole step is delegated to you</a:t>
-            </a:r>
-          </a:p>
-          <a:p>
-            <a:pPr lvl="1">
-              <a:spcAft>
-                <a:spcPts val="700"/>
-              </a:spcAft>
-            </a:pPr>
-            <a:r>
-              <a:rPr sz="1500" b="0">
-                <a:solidFill>
-                  <a:srgbClr val="1A1A1A"/>
-                </a:solidFill>
-              </a:rPr>
-              <a:t>– The routing consultant — when a branch depends on what the user wants, you find out which way they prefer</a:t>
-            </a:r>
-          </a:p>
-          <a:p>
-            <a:pPr>
-              <a:spcAft>
-                <a:spcPts val="700"/>
-              </a:spcAft>
-            </a:pPr>
-            <a:r>
-              <a:rPr sz="1700" b="0">
-                <a:solidFill>
-                  <a:srgbClr val="1A1A1A"/>
-                </a:solidFill>
-              </a:rPr>
-              <a:t>• **You do NOT build:** an MCP server, any understanding of BPMN, or any CUGA FLO data structures</a:t>
-            </a:r>
-          </a:p>
-          <a:p>
-            <a:pPr>
-              <a:spcAft>
-                <a:spcPts val="700"/>
-              </a:spcAft>
-            </a:pPr>
-            <a:r>
-              <a:rPr sz="1700" b="1">
-                <a:solidFill>
-                  <a:srgbClr val="1A1A1A"/>
-                </a:solidFill>
-              </a:rPr>
-              <a:t>• Text in, text out.</a:t>
-            </a:r>
-          </a:p>
-        </p:txBody>
-      </p:sp>
-    </p:spTree>
-  </p:cSld>
-  <p:clrMapOvr>
-    <a:masterClrMapping/>
-  </p:clrMapOvr>
-</p:sld>
-</file>
-
-<file path=ppt/slides/slide4.xml><?xml version="1.0" encoding="utf-8"?>
-<p:sld xmlns:a="http://schemas.openxmlformats.org/drawingml/2006/main" xmlns:p="http://schemas.openxmlformats.org/presentationml/2006/main" xmlns:r="http://schemas.openxmlformats.org/officeDocument/2006/relationships">
-  <p:cSld>
-    <p:spTree>
-      <p:nvGrpSpPr>
-        <p:cNvPr id="1" name=""/>
-        <p:cNvGrpSpPr/>
-        <p:nvPr/>
-      </p:nvGrpSpPr>
-      <p:grpSpPr/>
-      <p:sp>
-        <p:nvSpPr>
-          <p:cNvPr id="2" name="TextBox 1"/>
-          <p:cNvSpPr txBox="1"/>
-          <p:nvPr/>
-        </p:nvSpPr>
-        <p:spPr>
-          <a:xfrm>
-            <a:off x="548640" y="365760"/>
-            <a:ext cx="11064240" cy="822960"/>
-          </a:xfrm>
-          <a:prstGeom prst="rect">
-            <a:avLst/>
-          </a:prstGeom>
-          <a:noFill/>
-        </p:spPr>
-        <p:txBody>
-          <a:bodyPr wrap="none">
-            <a:spAutoFit/>
-          </a:bodyPr>
-          <a:lstStyle/>
-          <a:p>
-            <a:r>
-              <a:rPr sz="3000" b="1">
-                <a:solidFill>
-                  <a:srgbClr val="0B5C9E"/>
-                </a:solidFill>
-              </a:rPr>
-              <a:t>Wire contract</a:t>
-            </a:r>
-          </a:p>
-        </p:txBody>
-      </p:sp>
-      <p:sp>
-        <p:nvSpPr>
-          <p:cNvPr id="3" name="Rectangle 2"/>
-          <p:cNvSpPr/>
-          <p:nvPr/>
-        </p:nvSpPr>
-        <p:spPr>
-          <a:xfrm>
-            <a:off x="640080" y="1645920"/>
-            <a:ext cx="10972800" cy="4206240"/>
-          </a:xfrm>
-          <a:prstGeom prst="rect">
-            <a:avLst/>
-          </a:prstGeom>
-          <a:solidFill>
-            <a:srgbClr val="F2F3F5"/>
-          </a:solidFill>
-          <a:ln>
-            <a:solidFill>
-              <a:srgbClr val="D0D3D8"/>
-            </a:solidFill>
-          </a:ln>
-        </p:spPr>
-        <p:style>
-          <a:lnRef idx="1">
-            <a:schemeClr val="accent1"/>
-          </a:lnRef>
-          <a:fillRef idx="3">
-            <a:schemeClr val="accent1"/>
-          </a:fillRef>
-          <a:effectRef idx="2">
-            <a:schemeClr val="accent1"/>
-          </a:effectRef>
-          <a:fontRef idx="minor">
-            <a:schemeClr val="lt1"/>
-          </a:fontRef>
-        </p:style>
-        <p:txBody>
-          <a:bodyPr rtlCol="0" anchor="ctr" wrap="square" lIns="182880" rIns="182880" tIns="137160" bIns="137160"/>
-          <a:lstStyle/>
-          <a:p>
-            <a:pPr algn="ctr"/>
-            <a:r>
-              <a:rPr sz="1300">
-                <a:solidFill>
-                  <a:srgbClr val="1A1A1A"/>
-                </a:solidFill>
-                <a:latin typeface="Courier New"/>
-              </a:rPr>
-              <a:t>Protocol     A2A over JSON-RPC</a:t>
-            </a:r>
-          </a:p>
-          <a:p>
-            <a:r>
-              <a:rPr sz="1300">
-                <a:solidFill>
-                  <a:srgbClr val="1A1A1A"/>
-                </a:solidFill>
-                <a:latin typeface="Courier New"/>
-              </a:rPr>
-              <a:t>Method       message/send</a:t>
-            </a:r>
-          </a:p>
-          <a:p>
-            <a:r>
-              <a:rPr sz="1300">
-                <a:solidFill>
-                  <a:srgbClr val="1A1A1A"/>
-                </a:solidFill>
-                <a:latin typeface="Courier New"/>
-              </a:rPr>
-              <a:t>Agent card   GET /.well-known/agent-card.json</a:t>
-            </a:r>
-          </a:p>
-          <a:p>
-            <a:r>
-              <a:rPr sz="1300">
-                <a:solidFill>
-                  <a:srgbClr val="1A1A1A"/>
-                </a:solidFill>
-                <a:latin typeface="Courier New"/>
-              </a:rPr>
-              <a:t>SDK          a2a-sdk   (same package CUGA FLO's client uses)</a:t>
-            </a:r>
-          </a:p>
-          <a:p>
-            <a:r>
-              <a:rPr sz="1300">
-                <a:solidFill>
-                  <a:srgbClr val="1A1A1A"/>
-                </a:solidFill>
-                <a:latin typeface="Courier New"/>
-              </a:rPr>
-              <a:t/>
-            </a:r>
-          </a:p>
-          <a:p>
-            <a:r>
-              <a:rPr sz="1300">
-                <a:solidFill>
-                  <a:srgbClr val="1A1A1A"/>
-                </a:solidFill>
-                <a:latin typeface="Courier New"/>
-              </a:rPr>
-              <a:t>Implement with AgentExecutor (execute, cancel),</a:t>
-            </a:r>
-          </a:p>
-          <a:p>
-            <a:r>
-              <a:rPr sz="1300">
-                <a:solidFill>
-                  <a:srgbClr val="1A1A1A"/>
-                </a:solidFill>
-                <a:latin typeface="Courier New"/>
-              </a:rPr>
-              <a:t>served via DefaultRequestHandler + the SDK's</a:t>
-            </a:r>
-          </a:p>
-          <a:p>
-            <a:r>
-              <a:rPr sz="1300">
-                <a:solidFill>
-                  <a:srgbClr val="1A1A1A"/>
-                </a:solidFill>
-                <a:latin typeface="Courier New"/>
-              </a:rPr>
-              <a:t>JSON-RPC and agent-card routes.</a:t>
-            </a:r>
-          </a:p>
-          <a:p>
-            <a:r>
-              <a:rPr sz="1300">
-                <a:solidFill>
-                  <a:srgbClr val="1A1A1A"/>
-                </a:solidFill>
-                <a:latin typeface="Courier New"/>
-              </a:rPr>
-              <a:t/>
-            </a:r>
-          </a:p>
-          <a:p>
-            <a:r>
-              <a:rPr sz="1300">
-                <a:solidFill>
-                  <a:srgbClr val="1A1A1A"/>
-                </a:solidFill>
-                <a:latin typeface="Courier New"/>
-              </a:rPr>
-              <a:t>CUGA FLO sends a Message with a single TextPart.</a:t>
-            </a:r>
-          </a:p>
-          <a:p>
-            <a:r>
-              <a:rPr sz="1300">
-                <a:solidFill>
-                  <a:srgbClr val="1A1A1A"/>
-                </a:solidFill>
-                <a:latin typeface="Courier New"/>
-              </a:rPr>
-              <a:t>Reply with a plain Message carrying your final answer.</a:t>
-            </a:r>
-          </a:p>
-          <a:p>
-            <a:r>
-              <a:rPr sz="1300">
-                <a:solidFill>
-                  <a:srgbClr val="1A1A1A"/>
-                </a:solidFill>
-                <a:latin typeface="Courier New"/>
-              </a:rPr>
-              <a:t>   -&gt; never a Task: the client flattens a Task by joining every</a:t>
-            </a:r>
-          </a:p>
-          <a:p>
-            <a:r>
-              <a:rPr sz="1300">
-                <a:solidFill>
-                  <a:srgbClr val="1A1A1A"/>
-                </a:solidFill>
-                <a:latin typeface="Courier New"/>
-              </a:rPr>
-              <a:t>      message in history, so an interview would arrive as a</a:t>
-            </a:r>
-          </a:p>
-          <a:p>
-            <a:r>
-              <a:rPr sz="1300">
-                <a:solidFill>
-                  <a:srgbClr val="1A1A1A"/>
-                </a:solidFill>
-                <a:latin typeface="Courier New"/>
-              </a:rPr>
-              <a:t>      whole transcript rather than a conclusion.</a:t>
-            </a:r>
-          </a:p>
-        </p:txBody>
-      </p:sp>
-    </p:spTree>
-  </p:cSld>
-  <p:clrMapOvr>
-    <a:masterClrMapping/>
-  </p:clrMapOvr>
-</p:sld>
-</file>
-
-<file path=ppt/slides/slide5.xml><?xml version="1.0" encoding="utf-8"?>
-<p:sld xmlns:a="http://schemas.openxmlformats.org/drawingml/2006/main" xmlns:p="http://schemas.openxmlformats.org/presentationml/2006/main" xmlns:r="http://schemas.openxmlformats.org/officeDocument/2006/relationships">
-  <p:cSld>
-    <p:spTree>
-      <p:nvGrpSpPr>
-        <p:cNvPr id="1" name=""/>
-        <p:cNvGrpSpPr/>
-        <p:nvPr/>
-      </p:nvGrpSpPr>
-      <p:grpSpPr/>
-      <p:sp>
-        <p:nvSpPr>
-          <p:cNvPr id="2" name="TextBox 1"/>
-          <p:cNvSpPr txBox="1"/>
-          <p:nvPr/>
-        </p:nvSpPr>
-        <p:spPr>
-          <a:xfrm>
-            <a:off x="548640" y="365760"/>
-            <a:ext cx="11064240" cy="822960"/>
-          </a:xfrm>
-          <a:prstGeom prst="rect">
-            <a:avLst/>
-          </a:prstGeom>
-          <a:noFill/>
-        </p:spPr>
-        <p:txBody>
-          <a:bodyPr wrap="none">
-            <a:spAutoFit/>
-          </a:bodyPr>
-          <a:lstStyle/>
-          <a:p>
-            <a:r>
-              <a:rPr sz="3000" b="1">
-                <a:solidFill>
-                  <a:srgbClr val="0B5C9E"/>
-                </a:solidFill>
-              </a:rPr>
-              <a:t>One service, two capabilities — not two services</a:t>
-            </a:r>
-          </a:p>
-        </p:txBody>
-      </p:sp>
-      <p:sp>
-        <p:nvSpPr>
-          <p:cNvPr id="3" name="Rectangle 2"/>
-          <p:cNvSpPr/>
-          <p:nvPr/>
-        </p:nvSpPr>
-        <p:spPr>
-          <a:xfrm>
-            <a:off x="640080" y="1554480"/>
-            <a:ext cx="10972800" cy="2377440"/>
-          </a:xfrm>
-          <a:prstGeom prst="rect">
-            <a:avLst/>
-          </a:prstGeom>
-          <a:solidFill>
-            <a:srgbClr val="F2F3F5"/>
-          </a:solidFill>
-          <a:ln>
-            <a:solidFill>
-              <a:srgbClr val="D0D3D8"/>
-            </a:solidFill>
-          </a:ln>
-        </p:spPr>
-        <p:style>
-          <a:lnRef idx="1">
-            <a:schemeClr val="accent1"/>
-          </a:lnRef>
-          <a:fillRef idx="3">
-            <a:schemeClr val="accent1"/>
-          </a:fillRef>
-          <a:effectRef idx="2">
-            <a:schemeClr val="accent1"/>
-          </a:effectRef>
-          <a:fontRef idx="minor">
-            <a:schemeClr val="lt1"/>
-          </a:fontRef>
-        </p:style>
-        <p:txBody>
-          <a:bodyPr rtlCol="0" anchor="ctr" wrap="square" lIns="182880" rIns="182880" tIns="137160" bIns="137160"/>
-          <a:lstStyle/>
-          <a:p>
-            <a:pPr algn="ctr"/>
-            <a:r>
-              <a:rPr sz="1200">
-                <a:solidFill>
-                  <a:srgbClr val="1A1A1A"/>
-                </a:solidFill>
-                <a:latin typeface="Courier New"/>
-              </a:rPr>
-              <a:t>GET /.well-known/agent-card.json  --&gt;  the card (advertises what you can do)</a:t>
-            </a:r>
-          </a:p>
-          <a:p>
-            <a:r>
-              <a:rPr sz="1200">
-                <a:solidFill>
-                  <a:srgbClr val="1A1A1A"/>
-                </a:solidFill>
-                <a:latin typeface="Courier New"/>
-              </a:rPr>
-              <a:t/>
-            </a:r>
-          </a:p>
-          <a:p>
-            <a:r>
-              <a:rPr sz="1200">
-                <a:solidFill>
-                  <a:srgbClr val="1A1A1A"/>
-                </a:solidFill>
-                <a:latin typeface="Courier New"/>
-              </a:rPr>
-              <a:t>POST message/send  --&gt;  AgentExecutor.execute(context, event_queue)   &lt;- one entry point</a:t>
-            </a:r>
-          </a:p>
-          <a:p>
-            <a:r>
-              <a:rPr sz="1200">
-                <a:solidFill>
-                  <a:srgbClr val="1A1A1A"/>
-                </a:solidFill>
-                <a:latin typeface="Courier New"/>
-              </a:rPr>
-              <a:t>                          |  read metadata["variables"]["role"]</a:t>
-            </a:r>
-          </a:p>
-          <a:p>
-            <a:r>
-              <a:rPr sz="1200">
-                <a:solidFill>
-                  <a:srgbClr val="1A1A1A"/>
-                </a:solidFill>
-                <a:latin typeface="Courier New"/>
-              </a:rPr>
-              <a:t>                          |</a:t>
-            </a:r>
-          </a:p>
-          <a:p>
-            <a:r>
-              <a:rPr sz="1200">
-                <a:solidFill>
-                  <a:srgbClr val="1A1A1A"/>
-                </a:solidFill>
-                <a:latin typeface="Courier New"/>
-              </a:rPr>
-              <a:t>                          +- "fulfill_task"            -&gt; do the spreadsheet work</a:t>
-            </a:r>
-          </a:p>
-          <a:p>
-            <a:r>
-              <a:rPr sz="1200">
-                <a:solidFill>
-                  <a:srgbClr val="1A1A1A"/>
-                </a:solidFill>
-                <a:latin typeface="Courier New"/>
-              </a:rPr>
-              <a:t>                          +- "elicit_user_preference"  -&gt; interview the user, report back</a:t>
-            </a:r>
-          </a:p>
-        </p:txBody>
-      </p:sp>
-      <p:sp>
-        <p:nvSpPr>
-          <p:cNvPr id="4" name="TextBox 3"/>
-          <p:cNvSpPr txBox="1"/>
-          <p:nvPr/>
-        </p:nvSpPr>
-        <p:spPr>
-          <a:xfrm>
-            <a:off x="640080" y="4114800"/>
-            <a:ext cx="10972800" cy="4754880"/>
-          </a:xfrm>
-          <a:prstGeom prst="rect">
-            <a:avLst/>
-          </a:prstGeom>
-          <a:noFill/>
-        </p:spPr>
-        <p:txBody>
-          <a:bodyPr wrap="square">
-            <a:spAutoFit/>
-          </a:bodyPr>
-          <a:lstStyle/>
-          <a:p>
-            <a:pPr>
-              <a:spcAft>
-                <a:spcPts val="700"/>
-              </a:spcAft>
-            </a:pPr>
-            <a:r>
-              <a:rPr sz="1500" b="0">
-                <a:solidFill>
-                  <a:srgbClr val="1A1A1A"/>
-                </a:solidFill>
-              </a:rPr>
-              <a:t>• Nothing in an A2A request names a skill — Message has no skill field, and neither does RequestContext</a:t>
-            </a:r>
-          </a:p>
-          <a:p>
-            <a:pPr>
-              <a:spcAft>
-                <a:spcPts val="700"/>
-              </a:spcAft>
-            </a:pPr>
-            <a:r>
-              <a:rPr sz="1500" b="0">
-                <a:solidFill>
-                  <a:srgbClr val="1A1A1A"/>
-                </a:solidFill>
-              </a:rPr>
-              <a:t>• The card ADVERTISES capability; it does not ADDRESS it. Every call lands in the same execute().</a:t>
-            </a:r>
-          </a:p>
-          <a:p>
-            <a:pPr>
-              <a:spcAft>
-                <a:spcPts val="700"/>
-              </a:spcAft>
-            </a:pPr>
-            <a:r>
-              <a:rPr sz="1500" b="0">
-                <a:solidFill>
-                  <a:srgbClr val="1A1A1A"/>
-                </a:solidFill>
-              </a:rPr>
-              <a:t>• Skills (retrieve / update / run-function) are descriptive, never addressable — you dispatch internally.</a:t>
-            </a:r>
-          </a:p>
-        </p:txBody>
-      </p:sp>
-    </p:spTree>
-  </p:cSld>
-  <p:clrMapOvr>
-    <a:masterClrMapping/>
-  </p:clrMapOvr>
-</p:sld>
-</file>
-
-<file path=ppt/slides/slide6.xml><?xml version="1.0" encoding="utf-8"?>
-<p:sld xmlns:a="http://schemas.openxmlformats.org/drawingml/2006/main" xmlns:p="http://schemas.openxmlformats.org/presentationml/2006/main" xmlns:r="http://schemas.openxmlformats.org/officeDocument/2006/relationships">
-  <p:cSld>
-    <p:spTree>
-      <p:nvGrpSpPr>
-        <p:cNvPr id="1" name=""/>
-        <p:cNvGrpSpPr/>
-        <p:nvPr/>
-      </p:nvGrpSpPr>
-      <p:grpSpPr/>
-      <p:sp>
-        <p:nvSpPr>
-          <p:cNvPr id="2" name="TextBox 1"/>
-          <p:cNvSpPr txBox="1"/>
-          <p:nvPr/>
-        </p:nvSpPr>
-        <p:spPr>
-          <a:xfrm>
-            <a:off x="548640" y="365760"/>
-            <a:ext cx="11064240" cy="822960"/>
-          </a:xfrm>
-          <a:prstGeom prst="rect">
-            <a:avLst/>
-          </a:prstGeom>
-          <a:noFill/>
-        </p:spPr>
-        <p:txBody>
-          <a:bodyPr wrap="none">
-            <a:spAutoFit/>
-          </a:bodyPr>
-          <a:lstStyle/>
-          <a:p>
-            <a:r>
-              <a:rPr sz="3000" b="1">
-                <a:solidFill>
-                  <a:srgbClr val="0B5C9E"/>
-                </a:solidFill>
-              </a:rPr>
-              <a:t>The discriminator: role metadata</a:t>
-            </a:r>
-          </a:p>
-        </p:txBody>
-      </p:sp>
-      <p:sp>
-        <p:nvSpPr>
-          <p:cNvPr id="3" name="TextBox 2"/>
-          <p:cNvSpPr txBox="1"/>
-          <p:nvPr/>
-        </p:nvSpPr>
-        <p:spPr>
-          <a:xfrm>
-            <a:off x="566928" y="1051560"/>
-            <a:ext cx="11064240" cy="457200"/>
-          </a:xfrm>
-          <a:prstGeom prst="rect">
-            <a:avLst/>
-          </a:prstGeom>
-          <a:noFill/>
-        </p:spPr>
-        <p:txBody>
-          <a:bodyPr wrap="none">
-            <a:spAutoFit/>
-          </a:bodyPr>
-          <a:lstStyle/>
-          <a:p>
-            <a:r>
-              <a:rPr sz="1500" i="1">
-                <a:solidFill>
-                  <a:srgbClr val="606060"/>
-                </a:solidFill>
-              </a:rPr>
-              <a:t>Not Message.role — the name collision is an easy trap</a:t>
-            </a:r>
-          </a:p>
-        </p:txBody>
-      </p:sp>
-      <p:sp>
-        <p:nvSpPr>
-          <p:cNvPr id="4" name="TextBox 3"/>
-          <p:cNvSpPr txBox="1"/>
-          <p:nvPr/>
-        </p:nvSpPr>
-        <p:spPr>
-          <a:xfrm>
-            <a:off x="640080" y="1737360"/>
-            <a:ext cx="5303520" cy="457200"/>
-          </a:xfrm>
-          <a:prstGeom prst="rect">
-            <a:avLst/>
-          </a:prstGeom>
-          <a:noFill/>
-        </p:spPr>
-        <p:txBody>
-          <a:bodyPr wrap="none">
-            <a:spAutoFit/>
-          </a:bodyPr>
-          <a:lstStyle/>
-          <a:p>
-            <a:r>
-              <a:rPr sz="1700" b="1">
-                <a:solidFill>
-                  <a:srgbClr val="0B5C9E"/>
-                </a:solidFill>
-              </a:rPr>
-              <a:t>Message.role</a:t>
-            </a:r>
-          </a:p>
-        </p:txBody>
-      </p:sp>
-      <p:sp>
-        <p:nvSpPr>
-          <p:cNvPr id="5" name="TextBox 4"/>
-          <p:cNvSpPr txBox="1"/>
-          <p:nvPr/>
-        </p:nvSpPr>
-        <p:spPr>
-          <a:xfrm>
-            <a:off x="640080" y="2286000"/>
-            <a:ext cx="5394960" cy="4206240"/>
-          </a:xfrm>
-          <a:prstGeom prst="rect">
-            <a:avLst/>
-          </a:prstGeom>
-          <a:noFill/>
-        </p:spPr>
-        <p:txBody>
-          <a:bodyPr wrap="square">
-            <a:spAutoFit/>
-          </a:bodyPr>
-          <a:lstStyle/>
-          <a:p>
-            <a:pPr>
-              <a:spcAft>
-                <a:spcPts val="600"/>
-              </a:spcAft>
-            </a:pPr>
-            <a:r>
-              <a:rPr sz="1400">
-                <a:solidFill>
-                  <a:srgbClr val="1A1A1A"/>
-                </a:solidFill>
-              </a:rPr>
-              <a:t>• An A2A protocol field</a:t>
-            </a:r>
-          </a:p>
-          <a:p>
-            <a:pPr>
-              <a:spcAft>
-                <a:spcPts val="600"/>
-              </a:spcAft>
-            </a:pPr>
-            <a:r>
-              <a:rPr sz="1400">
-                <a:solidFill>
-                  <a:srgbClr val="1A1A1A"/>
-                </a:solidFill>
-              </a:rPr>
-              <a:t>• Values: ROLE_USER / ROLE_AGENT</a:t>
-            </a:r>
-          </a:p>
-          <a:p>
-            <a:pPr>
-              <a:spcAft>
-                <a:spcPts val="600"/>
-              </a:spcAft>
-            </a:pPr>
-            <a:r>
-              <a:rPr sz="1400">
-                <a:solidFill>
-                  <a:srgbClr val="1A1A1A"/>
-                </a:solidFill>
-              </a:rPr>
-              <a:t>• Means: who is speaking</a:t>
-            </a:r>
-          </a:p>
-          <a:p>
-            <a:pPr>
-              <a:spcAft>
-                <a:spcPts val="600"/>
-              </a:spcAft>
-            </a:pPr>
-            <a:r>
-              <a:rPr sz="1400">
-                <a:solidFill>
-                  <a:srgbClr val="1A1A1A"/>
-                </a:solidFill>
-              </a:rPr>
-              <a:t>• Lives on the Message</a:t>
-            </a:r>
-          </a:p>
-          <a:p>
-            <a:pPr>
-              <a:spcAft>
-                <a:spcPts val="600"/>
-              </a:spcAft>
-            </a:pPr>
-            <a:r>
-              <a:rPr sz="1400">
-                <a:solidFill>
-                  <a:srgbClr val="1A1A1A"/>
-                </a:solidFill>
-              </a:rPr>
-              <a:t>• CUGA FLO hardcodes it to user on every call — distinguishes nothing</a:t>
-            </a:r>
-          </a:p>
-        </p:txBody>
-      </p:sp>
-      <p:sp>
-        <p:nvSpPr>
-          <p:cNvPr id="6" name="TextBox 5"/>
-          <p:cNvSpPr txBox="1"/>
-          <p:nvPr/>
-        </p:nvSpPr>
-        <p:spPr>
-          <a:xfrm>
-            <a:off x="6400800" y="1737360"/>
-            <a:ext cx="5303520" cy="457200"/>
-          </a:xfrm>
-          <a:prstGeom prst="rect">
-            <a:avLst/>
-          </a:prstGeom>
-          <a:noFill/>
-        </p:spPr>
-        <p:txBody>
-          <a:bodyPr wrap="none">
-            <a:spAutoFit/>
-          </a:bodyPr>
-          <a:lstStyle/>
-          <a:p>
-            <a:r>
-              <a:rPr sz="1700" b="1">
-                <a:solidFill>
-                  <a:srgbClr val="0B5C9E"/>
-                </a:solidFill>
-              </a:rPr>
-              <a:t>our role</a:t>
-            </a:r>
-          </a:p>
-        </p:txBody>
-      </p:sp>
-      <p:sp>
-        <p:nvSpPr>
-          <p:cNvPr id="7" name="TextBox 6"/>
-          <p:cNvSpPr txBox="1"/>
-          <p:nvPr/>
-        </p:nvSpPr>
-        <p:spPr>
-          <a:xfrm>
-            <a:off x="6400800" y="2286000"/>
-            <a:ext cx="5394960" cy="4206240"/>
-          </a:xfrm>
-          <a:prstGeom prst="rect">
-            <a:avLst/>
-          </a:prstGeom>
-          <a:noFill/>
-        </p:spPr>
-        <p:txBody>
-          <a:bodyPr wrap="square">
-            <a:spAutoFit/>
-          </a:bodyPr>
-          <a:lstStyle/>
-          <a:p>
-            <a:pPr>
-              <a:spcAft>
-                <a:spcPts val="600"/>
-              </a:spcAft>
-            </a:pPr>
-            <a:r>
-              <a:rPr sz="1400">
-                <a:solidFill>
-                  <a:srgbClr val="1A1A1A"/>
-                </a:solidFill>
-              </a:rPr>
-              <a:t>• Our own convention, not part of A2A</a:t>
-            </a:r>
-          </a:p>
-          <a:p>
-            <a:pPr>
-              <a:spcAft>
-                <a:spcPts val="600"/>
-              </a:spcAft>
-            </a:pPr>
-            <a:r>
-              <a:rPr sz="1400">
-                <a:solidFill>
-                  <a:srgbClr val="1A1A1A"/>
-                </a:solidFill>
-              </a:rPr>
-              <a:t>• Values: fulfill_task / elicit_user_preference</a:t>
-            </a:r>
-          </a:p>
-          <a:p>
-            <a:pPr>
-              <a:spcAft>
-                <a:spcPts val="600"/>
-              </a:spcAft>
-            </a:pPr>
-            <a:r>
-              <a:rPr sz="1400">
-                <a:solidFill>
-                  <a:srgbClr val="1A1A1A"/>
-                </a:solidFill>
-              </a:rPr>
-              <a:t>• Means: which capability is wanted</a:t>
-            </a:r>
-          </a:p>
-          <a:p>
-            <a:pPr>
-              <a:spcAft>
-                <a:spcPts val="600"/>
-              </a:spcAft>
-            </a:pPr>
-            <a:r>
-              <a:rPr sz="1400">
-                <a:solidFill>
-                  <a:srgbClr val="1A1A1A"/>
-                </a:solidFill>
-              </a:rPr>
-              <a:t>• Lives on MessageSendParams.metadata, one level up</a:t>
-            </a:r>
-          </a:p>
-          <a:p>
-            <a:pPr>
-              <a:spcAft>
-                <a:spcPts val="600"/>
-              </a:spcAft>
-            </a:pPr>
-            <a:r>
-              <a:rPr sz="1400">
-                <a:solidFill>
-                  <a:srgbClr val="1A1A1A"/>
-                </a:solidFill>
-              </a:rPr>
-              <a:t>• Mandatory, always sent — dispatch on it directly</a:t>
-            </a:r>
-          </a:p>
-        </p:txBody>
-      </p:sp>
-      <p:sp>
-        <p:nvSpPr>
-          <p:cNvPr id="8" name="TextBox 7"/>
-          <p:cNvSpPr txBox="1"/>
-          <p:nvPr/>
-        </p:nvSpPr>
-        <p:spPr>
-          <a:xfrm>
-            <a:off x="640080" y="5943600"/>
-            <a:ext cx="10972800" cy="640080"/>
-          </a:xfrm>
-          <a:prstGeom prst="rect">
-            <a:avLst/>
-          </a:prstGeom>
-          <a:noFill/>
-        </p:spPr>
-        <p:txBody>
-          <a:bodyPr wrap="none">
-            <a:spAutoFit/>
-          </a:bodyPr>
-          <a:lstStyle/>
-          <a:p>
-            <a:r>
-              <a:rPr sz="1200">
-                <a:solidFill>
-                  <a:srgbClr val="606060"/>
-                </a:solidFill>
-                <a:latin typeface="Courier New"/>
-              </a:rPr>
-              <a:t>metadata = { "variables": { "role": "fulfill_task" } }   — absent / unrecognised role: fail loudly, do not guess from text</a:t>
-            </a:r>
-          </a:p>
-        </p:txBody>
-      </p:sp>
-    </p:spTree>
-  </p:cSld>
-  <p:clrMapOvr>
-    <a:masterClrMapping/>
-  </p:clrMapOvr>
-</p:sld>
-</file>
-
-<file path=ppt/slides/slide7.xml><?xml version="1.0" encoding="utf-8"?>
-<p:sld xmlns:a="http://schemas.openxmlformats.org/drawingml/2006/main" xmlns:p="http://schemas.openxmlformats.org/presentationml/2006/main" xmlns:r="http://schemas.openxmlformats.org/officeDocument/2006/relationships">
-  <p:cSld>
-    <p:spTree>
-      <p:nvGrpSpPr>
-        <p:cNvPr id="1" name=""/>
-        <p:cNvGrpSpPr/>
-        <p:nvPr/>
-      </p:nvGrpSpPr>
-      <p:grpSpPr/>
-      <p:sp>
-        <p:nvSpPr>
-          <p:cNvPr id="2" name="TextBox 1"/>
-          <p:cNvSpPr txBox="1"/>
-          <p:nvPr/>
-        </p:nvSpPr>
-        <p:spPr>
-          <a:xfrm>
-            <a:off x="548640" y="365760"/>
-            <a:ext cx="11064240" cy="822960"/>
-          </a:xfrm>
-          <a:prstGeom prst="rect">
-            <a:avLst/>
-          </a:prstGeom>
-          <a:noFill/>
-        </p:spPr>
-        <p:txBody>
-          <a:bodyPr wrap="none">
-            <a:spAutoFit/>
-          </a:bodyPr>
-          <a:lstStyle/>
-          <a:p>
-            <a:r>
-              <a:rPr sz="3000" b="1">
-                <a:solidFill>
-                  <a:srgbClr val="0B5C9E"/>
-                </a:solidFill>
-              </a:rPr>
-              <a:t>The agent card</a:t>
-            </a:r>
-          </a:p>
-        </p:txBody>
-      </p:sp>
-      <p:sp>
-        <p:nvSpPr>
-          <p:cNvPr id="3" name="TextBox 2"/>
-          <p:cNvSpPr txBox="1"/>
-          <p:nvPr/>
-        </p:nvSpPr>
-        <p:spPr>
-          <a:xfrm>
-            <a:off x="566928" y="1051560"/>
-            <a:ext cx="11064240" cy="457200"/>
-          </a:xfrm>
-          <a:prstGeom prst="rect">
-            <a:avLst/>
-          </a:prstGeom>
-          <a:noFill/>
-        </p:spPr>
-        <p:txBody>
-          <a:bodyPr wrap="none">
-            <a:spAutoFit/>
-          </a:bodyPr>
-          <a:lstStyle/>
-          <a:p>
-            <a:r>
-              <a:rPr sz="1500" i="1">
-                <a:solidFill>
-                  <a:srgbClr val="606060"/>
-                </a:solidFill>
-              </a:rPr>
-              <a:t>name and description are injected into the deciding agent's prompt — not documentation</a:t>
-            </a:r>
-          </a:p>
-        </p:txBody>
-      </p:sp>
-      <p:sp>
-        <p:nvSpPr>
-          <p:cNvPr id="4" name="Rectangle 3"/>
-          <p:cNvSpPr/>
-          <p:nvPr/>
-        </p:nvSpPr>
-        <p:spPr>
-          <a:xfrm>
-            <a:off x="640080" y="1554480"/>
-            <a:ext cx="10972800" cy="4754880"/>
-          </a:xfrm>
-          <a:prstGeom prst="rect">
-            <a:avLst/>
-          </a:prstGeom>
-          <a:solidFill>
-            <a:srgbClr val="F2F3F5"/>
-          </a:solidFill>
-          <a:ln>
-            <a:solidFill>
-              <a:srgbClr val="D0D3D8"/>
-            </a:solidFill>
-          </a:ln>
-        </p:spPr>
-        <p:style>
-          <a:lnRef idx="1">
-            <a:schemeClr val="accent1"/>
-          </a:lnRef>
-          <a:fillRef idx="3">
-            <a:schemeClr val="accent1"/>
-          </a:fillRef>
-          <a:effectRef idx="2">
-            <a:schemeClr val="accent1"/>
-          </a:effectRef>
-          <a:fontRef idx="minor">
-            <a:schemeClr val="lt1"/>
-          </a:fontRef>
-        </p:style>
-        <p:txBody>
-          <a:bodyPr rtlCol="0" anchor="ctr" wrap="square" lIns="182880" rIns="182880" tIns="137160" bIns="137160"/>
-          <a:lstStyle/>
-          <a:p>
-            <a:pPr algn="ctr"/>
-            <a:r>
-              <a:rPr sz="1200">
-                <a:solidFill>
-                  <a:srgbClr val="1A1A1A"/>
-                </a:solidFill>
-                <a:latin typeface="Courier New"/>
-              </a:rPr>
-              <a:t>{</a:t>
-            </a:r>
-          </a:p>
-          <a:p>
-            <a:r>
-              <a:rPr sz="1200">
-                <a:solidFill>
-                  <a:srgbClr val="1A1A1A"/>
-                </a:solidFill>
-                <a:latin typeface="Courier New"/>
-              </a:rPr>
-              <a:t>  "name": "agent0",</a:t>
-            </a:r>
-          </a:p>
-          <a:p>
-            <a:r>
-              <a:rPr sz="1200">
-                <a:solidFill>
-                  <a:srgbClr val="1A1A1A"/>
-                </a:solidFill>
-                <a:latin typeface="Courier New"/>
-              </a:rPr>
-              <a:t>  "description": "Performs retrieve, update and function/macro operations on Excel</a:t>
-            </a:r>
-          </a:p>
-          <a:p>
-            <a:r>
-              <a:rPr sz="1200">
-                <a:solidFill>
-                  <a:srgbClr val="1A1A1A"/>
-                </a:solidFill>
-                <a:latin typeface="Courier New"/>
-              </a:rPr>
-              <a:t>    spreadsheets, asking the user for any operation parameters the request does not</a:t>
-            </a:r>
-          </a:p>
-          <a:p>
-            <a:r>
-              <a:rPr sz="1200">
-                <a:solidFill>
-                  <a:srgbClr val="1A1A1A"/>
-                </a:solidFill>
-                <a:latin typeface="Courier New"/>
-              </a:rPr>
-              <a:t>    supply and handling dialogs those operations raise. Separately, reports the user's</a:t>
-            </a:r>
-          </a:p>
-          <a:p>
-            <a:r>
-              <a:rPr sz="1200">
-                <a:solidFill>
-                  <a:srgbClr val="1A1A1A"/>
-                </a:solidFill>
-                <a:latin typeface="Courier New"/>
-              </a:rPr>
-              <a:t>    preference between alternative routes when the process reaches a decision point.",</a:t>
-            </a:r>
-          </a:p>
-          <a:p>
-            <a:r>
-              <a:rPr sz="1200">
-                <a:solidFill>
-                  <a:srgbClr val="1A1A1A"/>
-                </a:solidFill>
-                <a:latin typeface="Courier New"/>
-              </a:rPr>
-              <a:t>  "version": "1.0.0",</a:t>
-            </a:r>
-          </a:p>
-          <a:p>
-            <a:r>
-              <a:rPr sz="1200">
-                <a:solidFill>
-                  <a:srgbClr val="1A1A1A"/>
-                </a:solidFill>
-                <a:latin typeface="Courier New"/>
-              </a:rPr>
-              <a:t>  "capabilities": { "streaming": false, "push_notifications": false },</a:t>
-            </a:r>
-          </a:p>
-          <a:p>
-            <a:r>
-              <a:rPr sz="1200">
-                <a:solidFill>
-                  <a:srgbClr val="1A1A1A"/>
-                </a:solidFill>
-                <a:latin typeface="Courier New"/>
-              </a:rPr>
-              <a:t>  "skills": [</a:t>
-            </a:r>
-          </a:p>
-          <a:p>
-            <a:r>
-              <a:rPr sz="1200">
-                <a:solidFill>
-                  <a:srgbClr val="1A1A1A"/>
-                </a:solidFill>
-                <a:latin typeface="Courier New"/>
-              </a:rPr>
-              <a:t>    { "id": "fulfill_task",            "name": "Perform a spreadsheet operation",  ... },</a:t>
-            </a:r>
-          </a:p>
-          <a:p>
-            <a:r>
-              <a:rPr sz="1200">
-                <a:solidFill>
-                  <a:srgbClr val="1A1A1A"/>
-                </a:solidFill>
-                <a:latin typeface="Courier New"/>
-              </a:rPr>
-              <a:t>    { "id": "elicit_user_preference",  "name": "Ask the user which way to go",     ... }</a:t>
-            </a:r>
-          </a:p>
-          <a:p>
-            <a:r>
-              <a:rPr sz="1200">
-                <a:solidFill>
-                  <a:srgbClr val="1A1A1A"/>
-                </a:solidFill>
-                <a:latin typeface="Courier New"/>
-              </a:rPr>
-              <a:t>  ]</a:t>
-            </a:r>
-          </a:p>
-          <a:p>
-            <a:r>
-              <a:rPr sz="1200">
-                <a:solidFill>
-                  <a:srgbClr val="1A1A1A"/>
-                </a:solidFill>
-                <a:latin typeface="Courier New"/>
-              </a:rPr>
-              <a:t>}</a:t>
-            </a:r>
-          </a:p>
-          <a:p>
-            <a:r>
-              <a:rPr sz="1200">
-                <a:solidFill>
-                  <a:srgbClr val="1A1A1A"/>
-                </a:solidFill>
-                <a:latin typeface="Courier New"/>
-              </a:rPr>
-              <a:t/>
-            </a:r>
-          </a:p>
-          <a:p>
-            <a:r>
-              <a:rPr sz="1200">
-                <a:solidFill>
-                  <a:srgbClr val="1A1A1A"/>
-                </a:solidFill>
-                <a:latin typeface="Courier New"/>
-              </a:rPr>
-              <a:t>Vague descriptions produce an agent that never calls you, or one that calls you for everything.</a:t>
-            </a:r>
-          </a:p>
-        </p:txBody>
-      </p:sp>
-    </p:spTree>
-  </p:cSld>
-  <p:clrMapOvr>
-    <a:masterClrMapping/>
-  </p:clrMapOvr>
-</p:sld>
-</file>
-
-<file path=ppt/slides/slide8.xml><?xml version="1.0" encoding="utf-8"?>
-<p:sld xmlns:a="http://schemas.openxmlformats.org/drawingml/2006/main" xmlns:p="http://schemas.openxmlformats.org/presentationml/2006/main" xmlns:r="http://schemas.openxmlformats.org/officeDocument/2006/relationships">
-  <p:cSld>
-    <p:spTree>
-      <p:nvGrpSpPr>
-        <p:cNvPr id="1" name=""/>
-        <p:cNvGrpSpPr/>
-        <p:nvPr/>
-      </p:nvGrpSpPr>
-      <p:grpSpPr/>
-      <p:sp>
-        <p:nvSpPr>
-          <p:cNvPr id="2" name="TextBox 1"/>
-          <p:cNvSpPr txBox="1"/>
-          <p:nvPr/>
-        </p:nvSpPr>
-        <p:spPr>
-          <a:xfrm>
-            <a:off x="548640" y="365760"/>
-            <a:ext cx="11064240" cy="822960"/>
-          </a:xfrm>
-          <a:prstGeom prst="rect">
-            <a:avLst/>
-          </a:prstGeom>
-          <a:noFill/>
-        </p:spPr>
-        <p:txBody>
-          <a:bodyPr wrap="none">
-            <a:spAutoFit/>
-          </a:bodyPr>
-          <a:lstStyle/>
-          <a:p>
-            <a:r>
-              <a:rPr sz="3000" b="1">
-                <a:solidFill>
-                  <a:srgbClr val="0B5C9E"/>
-                </a:solidFill>
-              </a:rPr>
-              <a:t>Skill: fulfill_task</a:t>
-            </a:r>
-          </a:p>
-        </p:txBody>
-      </p:sp>
-      <p:sp>
-        <p:nvSpPr>
-          <p:cNvPr id="3" name="TextBox 2"/>
-          <p:cNvSpPr txBox="1"/>
-          <p:nvPr/>
-        </p:nvSpPr>
-        <p:spPr>
-          <a:xfrm>
-            <a:off x="566928" y="1051560"/>
-            <a:ext cx="11064240" cy="457200"/>
-          </a:xfrm>
-          <a:prstGeom prst="rect">
-            <a:avLst/>
-          </a:prstGeom>
-          <a:noFill/>
-        </p:spPr>
-        <p:txBody>
-          <a:bodyPr wrap="none">
-            <a:spAutoFit/>
-          </a:bodyPr>
-          <a:lstStyle/>
-          <a:p>
-            <a:r>
-              <a:rPr sz="1500" i="1">
-                <a:solidFill>
-                  <a:srgbClr val="606060"/>
-                </a:solidFill>
-              </a:rPr>
-              <a:t>One request type, three operations you distinguish from the statement alone</a:t>
-            </a:r>
-          </a:p>
-        </p:txBody>
-      </p:sp>
-      <p:sp>
-        <p:nvSpPr>
-          <p:cNvPr id="4" name="TextBox 3"/>
-          <p:cNvSpPr txBox="1"/>
-          <p:nvPr/>
-        </p:nvSpPr>
-        <p:spPr>
-          <a:xfrm>
-            <a:off x="640080" y="1645920"/>
-            <a:ext cx="10972800" cy="4754880"/>
-          </a:xfrm>
-          <a:prstGeom prst="rect">
-            <a:avLst/>
-          </a:prstGeom>
-          <a:noFill/>
-        </p:spPr>
-        <p:txBody>
-          <a:bodyPr wrap="square">
-            <a:spAutoFit/>
-          </a:bodyPr>
-          <a:lstStyle/>
-          <a:p>
-            <a:pPr>
-              <a:spcAft>
-                <a:spcPts val="700"/>
-              </a:spcAft>
-            </a:pPr>
-            <a:r>
-              <a:rPr sz="1700" b="0">
-                <a:solidFill>
-                  <a:srgbClr val="1A1A1A"/>
-                </a:solidFill>
-              </a:rPr>
-              <a:t>• **RETRIEVE** — read a table, cells, or a column across a row range; report that it was retrieved</a:t>
-            </a:r>
-          </a:p>
-          <a:p>
-            <a:pPr>
-              <a:spcAft>
-                <a:spcPts val="700"/>
-              </a:spcAft>
-            </a:pPr>
-            <a:r>
-              <a:rPr sz="1700" b="0">
-                <a:solidFill>
-                  <a:srgbClr val="1A1A1A"/>
-                </a:solidFill>
-              </a:rPr>
-              <a:t>• **UPDATE** — write values into cells / a column for identified rows; answer any confirmation or validation dialogs raised</a:t>
-            </a:r>
-          </a:p>
-          <a:p>
-            <a:pPr>
-              <a:spcAft>
-                <a:spcPts val="700"/>
-              </a:spcAft>
-            </a:pPr>
-            <a:r>
-              <a:rPr sz="1700" b="0">
-                <a:solidFill>
-                  <a:srgbClr val="1A1A1A"/>
-                </a:solidFill>
-              </a:rPr>
-              <a:t>• **RUN FUNCTION** — execute a named function, macro or bot routine; report its outcome (including failures)</a:t>
-            </a:r>
-          </a:p>
-          <a:p>
-            <a:pPr>
-              <a:spcAft>
-                <a:spcPts val="700"/>
-              </a:spcAft>
-            </a:pPr>
-            <a:r>
-              <a:rPr sz="1700" b="1">
-                <a:solidFill>
-                  <a:srgbClr val="1A1A1A"/>
-                </a:solidFill>
-              </a:rPr>
-              <a:t>• The statement carries the operation type — CUGA FLO sends a goal, not a typed call. Your intent parsing is load-bearing.</a:t>
-            </a:r>
-          </a:p>
-          <a:p>
-            <a:pPr lvl="1">
-              <a:spcAft>
-                <a:spcPts val="700"/>
-              </a:spcAft>
-            </a:pPr>
-            <a:r>
-              <a:rPr sz="1500" b="0">
-                <a:solidFill>
-                  <a:srgbClr val="1A1A1A"/>
-                </a:solidFill>
-              </a:rPr>
-              <a:t>– A statement that does not clearly indicate one of the three: fail, do not guess</a:t>
-            </a:r>
-          </a:p>
-          <a:p>
-            <a:pPr>
-              <a:spcAft>
-                <a:spcPts val="700"/>
-              </a:spcAft>
-            </a:pPr>
-            <a:r>
-              <a:rPr sz="1700" b="1">
-                <a:solidFill>
-                  <a:srgbClr val="1A1A1A"/>
-                </a:solidFill>
-              </a:rPr>
-              <a:t>• A 'user escalation:' block may name parameters you must obtain from the user before proceeding</a:t>
-            </a:r>
-          </a:p>
-          <a:p>
-            <a:pPr lvl="1">
-              <a:spcAft>
-                <a:spcPts val="700"/>
-              </a:spcAft>
-            </a:pPr>
-            <a:r>
-              <a:rPr sz="1500" b="0">
-                <a:solidFill>
-                  <a:srgbClr val="1A1A1A"/>
-                </a:solidFill>
-              </a:rPr>
-              <a:t>– Escalation block present -&gt; ask the user, then act.   No block, parameter missing -&gt; fail with what was missing.</a:t>
-            </a:r>
-          </a:p>
-          <a:p>
-            <a:pPr>
-              <a:spcAft>
-                <a:spcPts val="700"/>
-              </a:spcAft>
-            </a:pPr>
-            <a:r>
-              <a:rPr sz="1700" b="0">
-                <a:solidFill>
-                  <a:srgbClr val="1A1A1A"/>
-                </a:solidFill>
-              </a:rPr>
-              <a:t>• **Reply with the outcome, not the payload** — one line that reads well in a process trace; no tables or row dumps</a:t>
-            </a:r>
-          </a:p>
-        </p:txBody>
-      </p:sp>
-    </p:spTree>
-  </p:cSld>
-  <p:clrMapOvr>
-    <a:masterClrMapping/>
-  </p:clrMapOvr>
-</p:sld>
-</file>
-
-<file path=ppt/slides/slide9.xml><?xml version="1.0" encoding="utf-8"?>
-<p:sld xmlns:a="http://schemas.openxmlformats.org/drawingml/2006/main" xmlns:p="http://schemas.openxmlformats.org/presentationml/2006/main" xmlns:r="http://schemas.openxmlformats.org/officeDocument/2006/relationships">
-  <p:cSld>
-    <p:spTree>
-      <p:nvGrpSpPr>
-        <p:cNvPr id="1" name=""/>
-        <p:cNvGrpSpPr/>
-        <p:nvPr/>
-      </p:nvGrpSpPr>
-      <p:grpSpPr/>
-      <p:sp>
-        <p:nvSpPr>
-          <p:cNvPr id="2" name="TextBox 1"/>
-          <p:cNvSpPr txBox="1"/>
-          <p:nvPr/>
-        </p:nvSpPr>
-        <p:spPr>
-          <a:xfrm>
-            <a:off x="548640" y="365760"/>
-            <a:ext cx="11064240" cy="822960"/>
-          </a:xfrm>
-          <a:prstGeom prst="rect">
-            <a:avLst/>
-          </a:prstGeom>
-          <a:noFill/>
-        </p:spPr>
-        <p:txBody>
-          <a:bodyPr wrap="none">
-            <a:spAutoFit/>
-          </a:bodyPr>
-          <a:lstStyle/>
-          <a:p>
-            <a:r>
-              <a:rPr sz="3000" b="1">
-                <a:solidFill>
-                  <a:srgbClr val="0B5C9E"/>
-                </a:solidFill>
-              </a:rPr>
-              <a:t>Skill: elicit_user_preference</a:t>
-            </a:r>
-          </a:p>
-        </p:txBody>
-      </p:sp>
-      <p:sp>
-        <p:nvSpPr>
-          <p:cNvPr id="3" name="TextBox 2"/>
-          <p:cNvSpPr txBox="1"/>
-          <p:nvPr/>
-        </p:nvSpPr>
-        <p:spPr>
-          <a:xfrm>
-            <a:off x="566928" y="1051560"/>
-            <a:ext cx="11064240" cy="457200"/>
-          </a:xfrm>
-          <a:prstGeom prst="rect">
-            <a:avLst/>
-          </a:prstGeom>
-          <a:noFill/>
-        </p:spPr>
-        <p:txBody>
-          <a:bodyPr wrap="none">
-            <a:spAutoFit/>
-          </a:bodyPr>
-          <a:lstStyle/>
-          <a:p>
-            <a:r>
-              <a:rPr sz="1500" i="1">
-                <a:solidFill>
-                  <a:srgbClr val="606060"/>
-                </a:solidFill>
-              </a:rPr>
-              <a:t>Used only at branch points — a routing question, nothing else</a:t>
-            </a:r>
-          </a:p>
-        </p:txBody>
-      </p:sp>
-      <p:sp>
-        <p:nvSpPr>
-          <p:cNvPr id="4" name="TextBox 3"/>
-          <p:cNvSpPr txBox="1"/>
-          <p:nvPr/>
-        </p:nvSpPr>
-        <p:spPr>
-          <a:xfrm>
-            <a:off x="640080" y="1645920"/>
-            <a:ext cx="10972800" cy="4754880"/>
-          </a:xfrm>
-          <a:prstGeom prst="rect">
-            <a:avLst/>
-          </a:prstGeom>
-          <a:noFill/>
-        </p:spPr>
-        <p:txBody>
-          <a:bodyPr wrap="square">
-            <a:spAutoFit/>
-          </a:bodyPr>
-          <a:lstStyle/>
-          <a:p>
-            <a:pPr>
-              <a:spcAft>
-                <a:spcPts val="700"/>
-              </a:spcAft>
-            </a:pPr>
-            <a:r>
-              <a:rPr sz="1700" b="0">
-                <a:solidFill>
-                  <a:srgbClr val="1A1A1A"/>
-                </a:solidFill>
-              </a:rPr>
-              <a:t>• Obtain the user's preference between the alternative routes available at a decision point</a:t>
-            </a:r>
-          </a:p>
-          <a:p>
-            <a:pPr>
-              <a:spcAft>
-                <a:spcPts val="700"/>
-              </a:spcAft>
-            </a:pPr>
-            <a:r>
-              <a:rPr sz="1700" b="0">
-                <a:solidFill>
-                  <a:srgbClr val="1A1A1A"/>
-                </a:solidFill>
-              </a:rPr>
-              <a:t>• It is a conversation, not a form — explain the alternatives, ask follow-ups where ambiguous, confirm</a:t>
-            </a:r>
-          </a:p>
-          <a:p>
-            <a:pPr>
-              <a:spcAft>
-                <a:spcPts val="700"/>
-              </a:spcAft>
-            </a:pPr>
-            <a:r>
-              <a:rPr sz="1700" b="0">
-                <a:solidFill>
-                  <a:srgbClr val="1A1A1A"/>
-                </a:solidFill>
-              </a:rPr>
-              <a:t>• **Report the preference — never state the routing decision.** CUGA FLO makes the decision.</a:t>
-            </a:r>
-          </a:p>
-          <a:p>
-            <a:pPr lvl="1">
-              <a:spcAft>
-                <a:spcPts val="700"/>
-              </a:spcAft>
-            </a:pPr>
-            <a:r>
-              <a:rPr sz="1500" b="0">
-                <a:solidFill>
-                  <a:srgbClr val="1A1A1A"/>
-                </a:solidFill>
-              </a:rPr>
-              <a:t>– "User prefers 'run function' over another update round."     — yes</a:t>
-            </a:r>
-          </a:p>
-          <a:p>
-            <a:pPr lvl="1">
-              <a:spcAft>
-                <a:spcPts val="700"/>
-              </a:spcAft>
-            </a:pPr>
-            <a:r>
-              <a:rPr sz="1500" b="0">
-                <a:solidFill>
-                  <a:srgbClr val="1A1A1A"/>
-                </a:solidFill>
-              </a:rPr>
-              <a:t>– "Run the function next."                                        — no</a:t>
-            </a:r>
-          </a:p>
-          <a:p>
-            <a:pPr>
-              <a:spcAft>
-                <a:spcPts val="700"/>
-              </a:spcAft>
-            </a:pPr>
-            <a:r>
-              <a:rPr sz="1700" b="0">
-                <a:solidFill>
-                  <a:srgbClr val="1A1A1A"/>
-                </a:solidFill>
-              </a:rPr>
-              <a:t>• Does NOT gather operation parameters — a request for a line item or a row value arrives as fulfill_task</a:t>
-            </a:r>
-          </a:p>
-          <a:p>
-            <a:pPr>
-              <a:spcAft>
-                <a:spcPts val="700"/>
-              </a:spcAft>
-            </a:pPr>
-            <a:r>
-              <a:rPr sz="1700" b="0">
-                <a:solidFill>
-                  <a:srgbClr val="1A1A1A"/>
-                </a:solidFill>
-              </a:rPr>
-              <a:t>• When the user was ambiguous, say so in the text — "best reading is X" beats a confident guess; CUGA FLO can route on that</a:t>
             </a:r>
           </a:p>
         </p:txBody>
